--- a/ВКР/ВКР_Василения_21ПГ.pptx
+++ b/ВКР/ВКР_Василения_21ПГ.pptx
@@ -5,7 +5,7 @@
     <p:sldMasterId id="2147483660" r:id="rId1"/>
   </p:sldMasterIdLst>
   <p:notesMasterIdLst>
-    <p:notesMasterId r:id="rId8"/>
+    <p:notesMasterId r:id="rId16"/>
   </p:notesMasterIdLst>
   <p:sldIdLst>
     <p:sldId id="283" r:id="rId2"/>
@@ -14,6 +14,14 @@
     <p:sldId id="285" r:id="rId5"/>
     <p:sldId id="286" r:id="rId6"/>
     <p:sldId id="288" r:id="rId7"/>
+    <p:sldId id="291" r:id="rId8"/>
+    <p:sldId id="292" r:id="rId9"/>
+    <p:sldId id="290" r:id="rId10"/>
+    <p:sldId id="293" r:id="rId11"/>
+    <p:sldId id="294" r:id="rId12"/>
+    <p:sldId id="295" r:id="rId13"/>
+    <p:sldId id="296" r:id="rId14"/>
+    <p:sldId id="297" r:id="rId15"/>
   </p:sldIdLst>
   <p:sldSz cx="9144000" cy="6858000" type="screen4x3"/>
   <p:notesSz cx="6858000" cy="9144000"/>
@@ -202,7 +210,7 @@
           <a:p>
             <a:fld id="{DC9D613D-7F9B-4E42-A6ED-9695358EDB07}" type="datetimeFigureOut">
               <a:rPr lang="ru-RU" smtClean="0"/>
-              <a:t>27.11.2025</a:t>
+              <a:t>26.03.2026</a:t>
             </a:fld>
             <a:endParaRPr lang="ru-RU"/>
           </a:p>
@@ -600,7 +608,7 @@
           <a:p>
             <a:fld id="{134615A2-30B3-416A-BAD5-95B1BE314A54}" type="datetime1">
               <a:rPr lang="ru-RU" smtClean="0"/>
-              <a:t>27.11.2025</a:t>
+              <a:t>26.03.2026</a:t>
             </a:fld>
             <a:endParaRPr lang="ru-RU"/>
           </a:p>
@@ -773,7 +781,7 @@
           <a:p>
             <a:fld id="{A0474D6D-E951-4260-98B9-66D920AA0D79}" type="datetime1">
               <a:rPr lang="ru-RU" smtClean="0"/>
-              <a:t>27.11.2025</a:t>
+              <a:t>26.03.2026</a:t>
             </a:fld>
             <a:endParaRPr lang="ru-RU"/>
           </a:p>
@@ -956,7 +964,7 @@
           <a:p>
             <a:fld id="{E260E25A-81F6-4E06-8056-5EE8F0636AA9}" type="datetime1">
               <a:rPr lang="ru-RU" smtClean="0"/>
-              <a:t>27.11.2025</a:t>
+              <a:t>26.03.2026</a:t>
             </a:fld>
             <a:endParaRPr lang="ru-RU"/>
           </a:p>
@@ -1129,7 +1137,7 @@
           <a:p>
             <a:fld id="{D26F0890-C51C-4616-BA92-31E98ECE5B68}" type="datetime1">
               <a:rPr lang="ru-RU" smtClean="0"/>
-              <a:t>27.11.2025</a:t>
+              <a:t>26.03.2026</a:t>
             </a:fld>
             <a:endParaRPr lang="ru-RU"/>
           </a:p>
@@ -1376,7 +1384,7 @@
           <a:p>
             <a:fld id="{6F764D2E-4112-4938-891A-6F3A791DFF66}" type="datetime1">
               <a:rPr lang="ru-RU" smtClean="0"/>
-              <a:t>27.11.2025</a:t>
+              <a:t>26.03.2026</a:t>
             </a:fld>
             <a:endParaRPr lang="ru-RU"/>
           </a:p>
@@ -1611,7 +1619,7 @@
           <a:p>
             <a:fld id="{CD8164B3-E779-4292-BEF5-D8CEC6D821A0}" type="datetime1">
               <a:rPr lang="ru-RU" smtClean="0"/>
-              <a:t>27.11.2025</a:t>
+              <a:t>26.03.2026</a:t>
             </a:fld>
             <a:endParaRPr lang="ru-RU"/>
           </a:p>
@@ -1981,7 +1989,7 @@
           <a:p>
             <a:fld id="{CDC9A13E-91ED-4F6D-BBD4-F3D60BCC2C98}" type="datetime1">
               <a:rPr lang="ru-RU" smtClean="0"/>
-              <a:t>27.11.2025</a:t>
+              <a:t>26.03.2026</a:t>
             </a:fld>
             <a:endParaRPr lang="ru-RU"/>
           </a:p>
@@ -2102,7 +2110,7 @@
           <a:p>
             <a:fld id="{23F1224B-DFC9-4FEB-8691-D4DF460BE9AB}" type="datetime1">
               <a:rPr lang="ru-RU" smtClean="0"/>
-              <a:t>27.11.2025</a:t>
+              <a:t>26.03.2026</a:t>
             </a:fld>
             <a:endParaRPr lang="ru-RU"/>
           </a:p>
@@ -2200,7 +2208,7 @@
           <a:p>
             <a:fld id="{1A44754D-5A89-4538-B4B0-681B83032999}" type="datetime1">
               <a:rPr lang="ru-RU" smtClean="0"/>
-              <a:t>27.11.2025</a:t>
+              <a:t>26.03.2026</a:t>
             </a:fld>
             <a:endParaRPr lang="ru-RU"/>
           </a:p>
@@ -2480,7 +2488,7 @@
           <a:p>
             <a:fld id="{E85CE03C-B778-4234-AF27-27A7E8676B7F}" type="datetime1">
               <a:rPr lang="ru-RU" smtClean="0"/>
-              <a:t>27.11.2025</a:t>
+              <a:t>26.03.2026</a:t>
             </a:fld>
             <a:endParaRPr lang="ru-RU"/>
           </a:p>
@@ -2740,7 +2748,7 @@
           <a:p>
             <a:fld id="{346656DA-8ADC-4140-8391-C5372C970DDA}" type="datetime1">
               <a:rPr lang="ru-RU" smtClean="0"/>
-              <a:t>27.11.2025</a:t>
+              <a:t>26.03.2026</a:t>
             </a:fld>
             <a:endParaRPr lang="ru-RU"/>
           </a:p>
@@ -2956,7 +2964,7 @@
           <a:p>
             <a:fld id="{B547DFDD-7F61-483E-A380-F061898845E2}" type="datetime1">
               <a:rPr lang="ru-RU" smtClean="0"/>
-              <a:t>27.11.2025</a:t>
+              <a:t>26.03.2026</a:t>
             </a:fld>
             <a:endParaRPr lang="ru-RU"/>
           </a:p>
@@ -3387,24 +3395,52 @@
           </a:bodyPr>
           <a:lstStyle/>
           <a:p>
+            <a:r>
+              <a:rPr lang="en-US" sz="4000" b="1" dirty="0">
+                <a:latin typeface="Times New Roman" panose="02020603050405020304" pitchFamily="18" charset="0"/>
+                <a:cs typeface="Times New Roman" panose="02020603050405020304" pitchFamily="18" charset="0"/>
+              </a:rPr>
+              <a:t/>
+            </a:r>
             <a:br>
               <a:rPr lang="en-US" sz="4000" b="1" dirty="0">
                 <a:latin typeface="Times New Roman" panose="02020603050405020304" pitchFamily="18" charset="0"/>
                 <a:cs typeface="Times New Roman" panose="02020603050405020304" pitchFamily="18" charset="0"/>
               </a:rPr>
             </a:br>
+            <a:r>
+              <a:rPr lang="en-US" sz="4000" b="1" dirty="0">
+                <a:latin typeface="Times New Roman" panose="02020603050405020304" pitchFamily="18" charset="0"/>
+                <a:cs typeface="Times New Roman" panose="02020603050405020304" pitchFamily="18" charset="0"/>
+              </a:rPr>
+              <a:t/>
+            </a:r>
             <a:br>
               <a:rPr lang="en-US" sz="4000" b="1" dirty="0">
                 <a:latin typeface="Times New Roman" panose="02020603050405020304" pitchFamily="18" charset="0"/>
                 <a:cs typeface="Times New Roman" panose="02020603050405020304" pitchFamily="18" charset="0"/>
               </a:rPr>
             </a:br>
+            <a:r>
+              <a:rPr lang="en-US" sz="4000" b="1" dirty="0">
+                <a:latin typeface="Times New Roman" panose="02020603050405020304" pitchFamily="18" charset="0"/>
+                <a:cs typeface="Times New Roman" panose="02020603050405020304" pitchFamily="18" charset="0"/>
+              </a:rPr>
+              <a:t/>
+            </a:r>
             <a:br>
               <a:rPr lang="en-US" sz="4000" b="1" dirty="0">
                 <a:latin typeface="Times New Roman" panose="02020603050405020304" pitchFamily="18" charset="0"/>
                 <a:cs typeface="Times New Roman" panose="02020603050405020304" pitchFamily="18" charset="0"/>
               </a:rPr>
             </a:br>
+            <a:r>
+              <a:rPr lang="en-US" sz="4000" b="1" dirty="0">
+                <a:latin typeface="Times New Roman" panose="02020603050405020304" pitchFamily="18" charset="0"/>
+                <a:cs typeface="Times New Roman" panose="02020603050405020304" pitchFamily="18" charset="0"/>
+              </a:rPr>
+              <a:t/>
+            </a:r>
             <a:br>
               <a:rPr lang="en-US" sz="4000" b="1" dirty="0">
                 <a:latin typeface="Times New Roman" panose="02020603050405020304" pitchFamily="18" charset="0"/>
@@ -4259,6 +4295,625 @@
   <p:clrMapOvr>
     <a:masterClrMapping/>
   </p:clrMapOvr>
+</p:sld>
+</file>
+
+<file path=ppt/slides/slide10.xml><?xml version="1.0" encoding="utf-8"?>
+<p:sld xmlns:a="http://schemas.openxmlformats.org/drawingml/2006/main" xmlns:r="http://schemas.openxmlformats.org/officeDocument/2006/relationships" xmlns:p="http://schemas.openxmlformats.org/presentationml/2006/main">
+  <p:cSld>
+    <p:spTree>
+      <p:nvGrpSpPr>
+        <p:cNvPr id="1" name=""/>
+        <p:cNvGrpSpPr/>
+        <p:nvPr/>
+      </p:nvGrpSpPr>
+      <p:grpSpPr>
+        <a:xfrm>
+          <a:off x="0" y="0"/>
+          <a:ext cx="0" cy="0"/>
+          <a:chOff x="0" y="0"/>
+          <a:chExt cx="0" cy="0"/>
+        </a:xfrm>
+      </p:grpSpPr>
+      <p:sp>
+        <p:nvSpPr>
+          <p:cNvPr id="2" name="Заголовок 1"/>
+          <p:cNvSpPr>
+            <a:spLocks noGrp="1"/>
+          </p:cNvSpPr>
+          <p:nvPr>
+            <p:ph type="title"/>
+          </p:nvPr>
+        </p:nvSpPr>
+        <p:spPr>
+          <a:xfrm>
+            <a:off x="628650" y="2"/>
+            <a:ext cx="7886700" cy="618565"/>
+          </a:xfrm>
+        </p:spPr>
+        <p:txBody>
+          <a:bodyPr>
+            <a:normAutofit/>
+          </a:bodyPr>
+          <a:lstStyle/>
+          <a:p>
+            <a:pPr algn="ctr"/>
+            <a:r>
+              <a:rPr lang="ru-RU" sz="2400" b="1" dirty="0" smtClean="0">
+                <a:latin typeface="Times New Roman" panose="02020603050405020304" pitchFamily="18" charset="0"/>
+                <a:cs typeface="Times New Roman" panose="02020603050405020304" pitchFamily="18" charset="0"/>
+              </a:rPr>
+              <a:t>Алгоритмы</a:t>
+            </a:r>
+            <a:endParaRPr lang="ru-RU" sz="2400" b="1" dirty="0">
+              <a:latin typeface="Times New Roman" panose="02020603050405020304" pitchFamily="18" charset="0"/>
+              <a:cs typeface="Times New Roman" panose="02020603050405020304" pitchFamily="18" charset="0"/>
+            </a:endParaRPr>
+          </a:p>
+        </p:txBody>
+      </p:sp>
+      <p:sp>
+        <p:nvSpPr>
+          <p:cNvPr id="11" name="Номер слайда 10"/>
+          <p:cNvSpPr>
+            <a:spLocks noGrp="1"/>
+          </p:cNvSpPr>
+          <p:nvPr>
+            <p:ph type="sldNum" sz="quarter" idx="12"/>
+          </p:nvPr>
+        </p:nvSpPr>
+        <p:spPr/>
+        <p:txBody>
+          <a:bodyPr/>
+          <a:lstStyle/>
+          <a:p>
+            <a:fld id="{97062FB6-5D41-4B3D-BD8B-8E2B9EA26C81}" type="slidenum">
+              <a:rPr lang="ru-RU" smtClean="0"/>
+              <a:t>10</a:t>
+            </a:fld>
+            <a:endParaRPr lang="ru-RU"/>
+          </a:p>
+        </p:txBody>
+      </p:sp>
+      <p:pic>
+        <p:nvPicPr>
+          <p:cNvPr id="5" name="Рисунок 4" descr="алгоритмы-поиск пары"/>
+          <p:cNvPicPr/>
+          <p:nvPr/>
+        </p:nvPicPr>
+        <p:blipFill>
+          <a:blip r:embed="rId2">
+            <a:extLst>
+              <a:ext uri="{28A0092B-C50C-407E-A947-70E740481C1C}">
+                <a14:useLocalDpi xmlns:a14="http://schemas.microsoft.com/office/drawing/2010/main" val="0"/>
+              </a:ext>
+            </a:extLst>
+          </a:blip>
+          <a:srcRect/>
+          <a:stretch>
+            <a:fillRect/>
+          </a:stretch>
+        </p:blipFill>
+        <p:spPr bwMode="auto">
+          <a:xfrm>
+            <a:off x="2683852" y="715353"/>
+            <a:ext cx="3774098" cy="5640998"/>
+          </a:xfrm>
+          <a:prstGeom prst="rect">
+            <a:avLst/>
+          </a:prstGeom>
+          <a:noFill/>
+          <a:ln>
+            <a:noFill/>
+          </a:ln>
+        </p:spPr>
+      </p:pic>
+    </p:spTree>
+    <p:extLst>
+      <p:ext uri="{BB962C8B-B14F-4D97-AF65-F5344CB8AC3E}">
+        <p14:creationId xmlns:p14="http://schemas.microsoft.com/office/powerpoint/2010/main" val="2571991606"/>
+      </p:ext>
+    </p:extLst>
+  </p:cSld>
+  <p:clrMapOvr>
+    <a:masterClrMapping/>
+  </p:clrMapOvr>
+</p:sld>
+</file>
+
+<file path=ppt/slides/slide11.xml><?xml version="1.0" encoding="utf-8"?>
+<p:sld xmlns:a="http://schemas.openxmlformats.org/drawingml/2006/main" xmlns:r="http://schemas.openxmlformats.org/officeDocument/2006/relationships" xmlns:p="http://schemas.openxmlformats.org/presentationml/2006/main">
+  <p:cSld>
+    <p:spTree>
+      <p:nvGrpSpPr>
+        <p:cNvPr id="1" name=""/>
+        <p:cNvGrpSpPr/>
+        <p:nvPr/>
+      </p:nvGrpSpPr>
+      <p:grpSpPr>
+        <a:xfrm>
+          <a:off x="0" y="0"/>
+          <a:ext cx="0" cy="0"/>
+          <a:chOff x="0" y="0"/>
+          <a:chExt cx="0" cy="0"/>
+        </a:xfrm>
+      </p:grpSpPr>
+      <p:sp>
+        <p:nvSpPr>
+          <p:cNvPr id="2" name="Заголовок 1"/>
+          <p:cNvSpPr>
+            <a:spLocks noGrp="1"/>
+          </p:cNvSpPr>
+          <p:nvPr>
+            <p:ph type="title"/>
+          </p:nvPr>
+        </p:nvSpPr>
+        <p:spPr>
+          <a:xfrm>
+            <a:off x="628650" y="2"/>
+            <a:ext cx="7886700" cy="618565"/>
+          </a:xfrm>
+        </p:spPr>
+        <p:txBody>
+          <a:bodyPr>
+            <a:normAutofit/>
+          </a:bodyPr>
+          <a:lstStyle/>
+          <a:p>
+            <a:pPr algn="ctr"/>
+            <a:r>
+              <a:rPr lang="ru-RU" sz="2400" b="1" dirty="0" smtClean="0">
+                <a:latin typeface="Times New Roman" panose="02020603050405020304" pitchFamily="18" charset="0"/>
+                <a:cs typeface="Times New Roman" panose="02020603050405020304" pitchFamily="18" charset="0"/>
+              </a:rPr>
+              <a:t>Интерфейсы</a:t>
+            </a:r>
+            <a:endParaRPr lang="ru-RU" sz="2400" b="1" dirty="0">
+              <a:latin typeface="Times New Roman" panose="02020603050405020304" pitchFamily="18" charset="0"/>
+              <a:cs typeface="Times New Roman" panose="02020603050405020304" pitchFamily="18" charset="0"/>
+            </a:endParaRPr>
+          </a:p>
+        </p:txBody>
+      </p:sp>
+      <p:sp>
+        <p:nvSpPr>
+          <p:cNvPr id="11" name="Номер слайда 10"/>
+          <p:cNvSpPr>
+            <a:spLocks noGrp="1"/>
+          </p:cNvSpPr>
+          <p:nvPr>
+            <p:ph type="sldNum" sz="quarter" idx="12"/>
+          </p:nvPr>
+        </p:nvSpPr>
+        <p:spPr/>
+        <p:txBody>
+          <a:bodyPr/>
+          <a:lstStyle/>
+          <a:p>
+            <a:fld id="{97062FB6-5D41-4B3D-BD8B-8E2B9EA26C81}" type="slidenum">
+              <a:rPr lang="ru-RU" smtClean="0"/>
+              <a:t>11</a:t>
+            </a:fld>
+            <a:endParaRPr lang="ru-RU"/>
+          </a:p>
+        </p:txBody>
+      </p:sp>
+      <p:pic>
+        <p:nvPicPr>
+          <p:cNvPr id="6" name="Рисунок 5"/>
+          <p:cNvPicPr/>
+          <p:nvPr/>
+        </p:nvPicPr>
+        <p:blipFill>
+          <a:blip r:embed="rId2"/>
+          <a:stretch>
+            <a:fillRect/>
+          </a:stretch>
+        </p:blipFill>
+        <p:spPr>
+          <a:xfrm>
+            <a:off x="2002790" y="1109662"/>
+            <a:ext cx="5138420" cy="4638675"/>
+          </a:xfrm>
+          <a:prstGeom prst="rect">
+            <a:avLst/>
+          </a:prstGeom>
+        </p:spPr>
+      </p:pic>
+    </p:spTree>
+    <p:extLst>
+      <p:ext uri="{BB962C8B-B14F-4D97-AF65-F5344CB8AC3E}">
+        <p14:creationId xmlns:p14="http://schemas.microsoft.com/office/powerpoint/2010/main" val="3953250726"/>
+      </p:ext>
+    </p:extLst>
+  </p:cSld>
+  <p:clrMapOvr>
+    <a:masterClrMapping/>
+  </p:clrMapOvr>
+</p:sld>
+</file>
+
+<file path=ppt/slides/slide12.xml><?xml version="1.0" encoding="utf-8"?>
+<p:sld xmlns:a="http://schemas.openxmlformats.org/drawingml/2006/main" xmlns:r="http://schemas.openxmlformats.org/officeDocument/2006/relationships" xmlns:p="http://schemas.openxmlformats.org/presentationml/2006/main">
+  <p:cSld>
+    <p:spTree>
+      <p:nvGrpSpPr>
+        <p:cNvPr id="1" name=""/>
+        <p:cNvGrpSpPr/>
+        <p:nvPr/>
+      </p:nvGrpSpPr>
+      <p:grpSpPr>
+        <a:xfrm>
+          <a:off x="0" y="0"/>
+          <a:ext cx="0" cy="0"/>
+          <a:chOff x="0" y="0"/>
+          <a:chExt cx="0" cy="0"/>
+        </a:xfrm>
+      </p:grpSpPr>
+      <p:sp>
+        <p:nvSpPr>
+          <p:cNvPr id="2" name="Заголовок 1"/>
+          <p:cNvSpPr>
+            <a:spLocks noGrp="1"/>
+          </p:cNvSpPr>
+          <p:nvPr>
+            <p:ph type="title"/>
+          </p:nvPr>
+        </p:nvSpPr>
+        <p:spPr>
+          <a:xfrm>
+            <a:off x="628650" y="2"/>
+            <a:ext cx="7886700" cy="618565"/>
+          </a:xfrm>
+        </p:spPr>
+        <p:txBody>
+          <a:bodyPr>
+            <a:normAutofit/>
+          </a:bodyPr>
+          <a:lstStyle/>
+          <a:p>
+            <a:pPr algn="ctr"/>
+            <a:r>
+              <a:rPr lang="ru-RU" sz="2400" b="1" dirty="0" smtClean="0">
+                <a:latin typeface="Times New Roman" panose="02020603050405020304" pitchFamily="18" charset="0"/>
+                <a:cs typeface="Times New Roman" panose="02020603050405020304" pitchFamily="18" charset="0"/>
+              </a:rPr>
+              <a:t>Интерфейсы</a:t>
+            </a:r>
+            <a:endParaRPr lang="ru-RU" sz="2400" b="1" dirty="0">
+              <a:latin typeface="Times New Roman" panose="02020603050405020304" pitchFamily="18" charset="0"/>
+              <a:cs typeface="Times New Roman" panose="02020603050405020304" pitchFamily="18" charset="0"/>
+            </a:endParaRPr>
+          </a:p>
+        </p:txBody>
+      </p:sp>
+      <p:sp>
+        <p:nvSpPr>
+          <p:cNvPr id="11" name="Номер слайда 10"/>
+          <p:cNvSpPr>
+            <a:spLocks noGrp="1"/>
+          </p:cNvSpPr>
+          <p:nvPr>
+            <p:ph type="sldNum" sz="quarter" idx="12"/>
+          </p:nvPr>
+        </p:nvSpPr>
+        <p:spPr/>
+        <p:txBody>
+          <a:bodyPr/>
+          <a:lstStyle/>
+          <a:p>
+            <a:fld id="{97062FB6-5D41-4B3D-BD8B-8E2B9EA26C81}" type="slidenum">
+              <a:rPr lang="ru-RU" smtClean="0"/>
+              <a:t>12</a:t>
+            </a:fld>
+            <a:endParaRPr lang="ru-RU"/>
+          </a:p>
+        </p:txBody>
+      </p:sp>
+      <p:pic>
+        <p:nvPicPr>
+          <p:cNvPr id="6" name="Рисунок 5"/>
+          <p:cNvPicPr/>
+          <p:nvPr/>
+        </p:nvPicPr>
+        <p:blipFill>
+          <a:blip r:embed="rId2"/>
+          <a:stretch>
+            <a:fillRect/>
+          </a:stretch>
+        </p:blipFill>
+        <p:spPr>
+          <a:xfrm>
+            <a:off x="1847850" y="1805940"/>
+            <a:ext cx="5448300" cy="3246120"/>
+          </a:xfrm>
+          <a:prstGeom prst="rect">
+            <a:avLst/>
+          </a:prstGeom>
+        </p:spPr>
+      </p:pic>
+    </p:spTree>
+    <p:extLst>
+      <p:ext uri="{BB962C8B-B14F-4D97-AF65-F5344CB8AC3E}">
+        <p14:creationId xmlns:p14="http://schemas.microsoft.com/office/powerpoint/2010/main" val="3794651031"/>
+      </p:ext>
+    </p:extLst>
+  </p:cSld>
+  <p:clrMapOvr>
+    <a:masterClrMapping/>
+  </p:clrMapOvr>
+</p:sld>
+</file>
+
+<file path=ppt/slides/slide13.xml><?xml version="1.0" encoding="utf-8"?>
+<p:sld xmlns:a="http://schemas.openxmlformats.org/drawingml/2006/main" xmlns:r="http://schemas.openxmlformats.org/officeDocument/2006/relationships" xmlns:p="http://schemas.openxmlformats.org/presentationml/2006/main">
+  <p:cSld>
+    <p:spTree>
+      <p:nvGrpSpPr>
+        <p:cNvPr id="1" name=""/>
+        <p:cNvGrpSpPr/>
+        <p:nvPr/>
+      </p:nvGrpSpPr>
+      <p:grpSpPr>
+        <a:xfrm>
+          <a:off x="0" y="0"/>
+          <a:ext cx="0" cy="0"/>
+          <a:chOff x="0" y="0"/>
+          <a:chExt cx="0" cy="0"/>
+        </a:xfrm>
+      </p:grpSpPr>
+      <p:sp>
+        <p:nvSpPr>
+          <p:cNvPr id="2" name="Заголовок 1"/>
+          <p:cNvSpPr>
+            <a:spLocks noGrp="1"/>
+          </p:cNvSpPr>
+          <p:nvPr>
+            <p:ph type="title"/>
+          </p:nvPr>
+        </p:nvSpPr>
+        <p:spPr>
+          <a:xfrm>
+            <a:off x="628650" y="2"/>
+            <a:ext cx="7886700" cy="618565"/>
+          </a:xfrm>
+        </p:spPr>
+        <p:txBody>
+          <a:bodyPr>
+            <a:normAutofit/>
+          </a:bodyPr>
+          <a:lstStyle/>
+          <a:p>
+            <a:pPr algn="ctr"/>
+            <a:r>
+              <a:rPr lang="ru-RU" sz="2400" b="1" dirty="0" smtClean="0">
+                <a:latin typeface="Times New Roman" panose="02020603050405020304" pitchFamily="18" charset="0"/>
+                <a:cs typeface="Times New Roman" panose="02020603050405020304" pitchFamily="18" charset="0"/>
+              </a:rPr>
+              <a:t>Интерфейсы</a:t>
+            </a:r>
+            <a:endParaRPr lang="ru-RU" sz="2400" b="1" dirty="0">
+              <a:latin typeface="Times New Roman" panose="02020603050405020304" pitchFamily="18" charset="0"/>
+              <a:cs typeface="Times New Roman" panose="02020603050405020304" pitchFamily="18" charset="0"/>
+            </a:endParaRPr>
+          </a:p>
+        </p:txBody>
+      </p:sp>
+      <p:sp>
+        <p:nvSpPr>
+          <p:cNvPr id="11" name="Номер слайда 10"/>
+          <p:cNvSpPr>
+            <a:spLocks noGrp="1"/>
+          </p:cNvSpPr>
+          <p:nvPr>
+            <p:ph type="sldNum" sz="quarter" idx="12"/>
+          </p:nvPr>
+        </p:nvSpPr>
+        <p:spPr/>
+        <p:txBody>
+          <a:bodyPr/>
+          <a:lstStyle/>
+          <a:p>
+            <a:fld id="{97062FB6-5D41-4B3D-BD8B-8E2B9EA26C81}" type="slidenum">
+              <a:rPr lang="ru-RU" smtClean="0"/>
+              <a:t>13</a:t>
+            </a:fld>
+            <a:endParaRPr lang="ru-RU"/>
+          </a:p>
+        </p:txBody>
+      </p:sp>
+      <p:pic>
+        <p:nvPicPr>
+          <p:cNvPr id="6" name="Рисунок 5"/>
+          <p:cNvPicPr/>
+          <p:nvPr/>
+        </p:nvPicPr>
+        <p:blipFill>
+          <a:blip r:embed="rId2"/>
+          <a:stretch>
+            <a:fillRect/>
+          </a:stretch>
+        </p:blipFill>
+        <p:spPr>
+          <a:xfrm>
+            <a:off x="2402180" y="825158"/>
+            <a:ext cx="4055770" cy="3269329"/>
+          </a:xfrm>
+          <a:prstGeom prst="rect">
+            <a:avLst/>
+          </a:prstGeom>
+        </p:spPr>
+      </p:pic>
+      <p:pic>
+        <p:nvPicPr>
+          <p:cNvPr id="7" name="Рисунок 6"/>
+          <p:cNvPicPr/>
+          <p:nvPr/>
+        </p:nvPicPr>
+        <p:blipFill>
+          <a:blip r:embed="rId3"/>
+          <a:stretch>
+            <a:fillRect/>
+          </a:stretch>
+        </p:blipFill>
+        <p:spPr>
+          <a:xfrm>
+            <a:off x="1920988" y="4301078"/>
+            <a:ext cx="5018153" cy="1764959"/>
+          </a:xfrm>
+          <a:prstGeom prst="rect">
+            <a:avLst/>
+          </a:prstGeom>
+        </p:spPr>
+      </p:pic>
+    </p:spTree>
+    <p:extLst>
+      <p:ext uri="{BB962C8B-B14F-4D97-AF65-F5344CB8AC3E}">
+        <p14:creationId xmlns:p14="http://schemas.microsoft.com/office/powerpoint/2010/main" val="2001085086"/>
+      </p:ext>
+    </p:extLst>
+  </p:cSld>
+  <p:clrMapOvr>
+    <a:masterClrMapping/>
+  </p:clrMapOvr>
+</p:sld>
+</file>
+
+<file path=ppt/slides/slide14.xml><?xml version="1.0" encoding="utf-8"?>
+<p:sld xmlns:a="http://schemas.openxmlformats.org/drawingml/2006/main" xmlns:r="http://schemas.openxmlformats.org/officeDocument/2006/relationships" xmlns:p="http://schemas.openxmlformats.org/presentationml/2006/main">
+  <p:cSld>
+    <p:spTree>
+      <p:nvGrpSpPr>
+        <p:cNvPr id="1" name=""/>
+        <p:cNvGrpSpPr/>
+        <p:nvPr/>
+      </p:nvGrpSpPr>
+      <p:grpSpPr>
+        <a:xfrm>
+          <a:off x="0" y="0"/>
+          <a:ext cx="0" cy="0"/>
+          <a:chOff x="0" y="0"/>
+          <a:chExt cx="0" cy="0"/>
+        </a:xfrm>
+      </p:grpSpPr>
+      <p:sp>
+        <p:nvSpPr>
+          <p:cNvPr id="4" name="Номер слайда 3"/>
+          <p:cNvSpPr>
+            <a:spLocks noGrp="1"/>
+          </p:cNvSpPr>
+          <p:nvPr>
+            <p:ph type="sldNum" sz="quarter" idx="12"/>
+          </p:nvPr>
+        </p:nvSpPr>
+        <p:spPr/>
+        <p:txBody>
+          <a:bodyPr/>
+          <a:lstStyle/>
+          <a:p>
+            <a:fld id="{97062FB6-5D41-4B3D-BD8B-8E2B9EA26C81}" type="slidenum">
+              <a:rPr lang="ru-RU" smtClean="0"/>
+              <a:t>14</a:t>
+            </a:fld>
+            <a:endParaRPr lang="ru-RU"/>
+          </a:p>
+        </p:txBody>
+      </p:sp>
+      <p:pic>
+        <p:nvPicPr>
+          <p:cNvPr id="5" name="Объект 4"/>
+          <p:cNvPicPr>
+            <a:picLocks noGrp="1"/>
+          </p:cNvPicPr>
+          <p:nvPr>
+            <p:ph idx="1"/>
+          </p:nvPr>
+        </p:nvPicPr>
+        <p:blipFill>
+          <a:blip r:embed="rId2"/>
+          <a:stretch>
+            <a:fillRect/>
+          </a:stretch>
+        </p:blipFill>
+        <p:spPr>
+          <a:xfrm>
+            <a:off x="942468" y="2300844"/>
+            <a:ext cx="7259063" cy="3400900"/>
+          </a:xfrm>
+          <a:prstGeom prst="rect">
+            <a:avLst/>
+          </a:prstGeom>
+        </p:spPr>
+      </p:pic>
+      <p:sp>
+        <p:nvSpPr>
+          <p:cNvPr id="6" name="Заголовок 1"/>
+          <p:cNvSpPr txBox="1">
+            <a:spLocks/>
+          </p:cNvSpPr>
+          <p:nvPr/>
+        </p:nvSpPr>
+        <p:spPr>
+          <a:xfrm>
+            <a:off x="628650" y="2"/>
+            <a:ext cx="7886700" cy="618565"/>
+          </a:xfrm>
+          <a:prstGeom prst="rect">
+            <a:avLst/>
+          </a:prstGeom>
+        </p:spPr>
+        <p:txBody>
+          <a:bodyPr vert="horz" lIns="91440" tIns="45720" rIns="91440" bIns="45720" rtlCol="0" anchor="ctr">
+            <a:normAutofit/>
+          </a:bodyPr>
+          <a:lstStyle>
+            <a:lvl1pPr algn="l" defTabSz="914400" rtl="0" eaLnBrk="1" latinLnBrk="0" hangingPunct="1">
+              <a:lnSpc>
+                <a:spcPct val="90000"/>
+              </a:lnSpc>
+              <a:spcBef>
+                <a:spcPct val="0"/>
+              </a:spcBef>
+              <a:buNone/>
+              <a:defRPr sz="4400" kern="1200">
+                <a:solidFill>
+                  <a:schemeClr val="tx1"/>
+                </a:solidFill>
+                <a:latin typeface="+mj-lt"/>
+                <a:ea typeface="+mj-ea"/>
+                <a:cs typeface="+mj-cs"/>
+              </a:defRPr>
+            </a:lvl1pPr>
+          </a:lstStyle>
+          <a:p>
+            <a:pPr algn="ctr"/>
+            <a:r>
+              <a:rPr lang="ru-RU" sz="2400" b="1" dirty="0" smtClean="0">
+                <a:latin typeface="Times New Roman" panose="02020603050405020304" pitchFamily="18" charset="0"/>
+                <a:cs typeface="Times New Roman" panose="02020603050405020304" pitchFamily="18" charset="0"/>
+              </a:rPr>
+              <a:t>Интерфейсы</a:t>
+            </a:r>
+            <a:endParaRPr lang="ru-RU" sz="2400" b="1" dirty="0">
+              <a:latin typeface="Times New Roman" panose="02020603050405020304" pitchFamily="18" charset="0"/>
+              <a:cs typeface="Times New Roman" panose="02020603050405020304" pitchFamily="18" charset="0"/>
+            </a:endParaRPr>
+          </a:p>
+        </p:txBody>
+      </p:sp>
+    </p:spTree>
+    <p:extLst>
+      <p:ext uri="{BB962C8B-B14F-4D97-AF65-F5344CB8AC3E}">
+        <p14:creationId xmlns:p14="http://schemas.microsoft.com/office/powerpoint/2010/main" val="1268620346"/>
+      </p:ext>
+    </p:extLst>
+  </p:cSld>
+  <p:clrMapOvr>
+    <a:masterClrMapping/>
+  </p:clrMapOvr>
+  <p:transition spd="slow">
+    <p:push dir="u"/>
+  </p:transition>
 </p:sld>
 </file>
 
@@ -6936,6 +7591,446 @@
 </p:sld>
 </file>
 
+<file path=ppt/slides/slide7.xml><?xml version="1.0" encoding="utf-8"?>
+<p:sld xmlns:a="http://schemas.openxmlformats.org/drawingml/2006/main" xmlns:r="http://schemas.openxmlformats.org/officeDocument/2006/relationships" xmlns:p="http://schemas.openxmlformats.org/presentationml/2006/main">
+  <p:cSld>
+    <p:spTree>
+      <p:nvGrpSpPr>
+        <p:cNvPr id="1" name=""/>
+        <p:cNvGrpSpPr/>
+        <p:nvPr/>
+      </p:nvGrpSpPr>
+      <p:grpSpPr>
+        <a:xfrm>
+          <a:off x="0" y="0"/>
+          <a:ext cx="0" cy="0"/>
+          <a:chOff x="0" y="0"/>
+          <a:chExt cx="0" cy="0"/>
+        </a:xfrm>
+      </p:grpSpPr>
+      <p:sp>
+        <p:nvSpPr>
+          <p:cNvPr id="2" name="Заголовок 1"/>
+          <p:cNvSpPr>
+            <a:spLocks noGrp="1"/>
+          </p:cNvSpPr>
+          <p:nvPr>
+            <p:ph type="title"/>
+          </p:nvPr>
+        </p:nvSpPr>
+        <p:spPr>
+          <a:xfrm>
+            <a:off x="628650" y="2"/>
+            <a:ext cx="7886700" cy="618565"/>
+          </a:xfrm>
+        </p:spPr>
+        <p:txBody>
+          <a:bodyPr>
+            <a:normAutofit/>
+          </a:bodyPr>
+          <a:lstStyle/>
+          <a:p>
+            <a:pPr algn="ctr"/>
+            <a:r>
+              <a:rPr lang="ru-RU" sz="2400" b="1" dirty="0" smtClean="0">
+                <a:latin typeface="Times New Roman" panose="02020603050405020304" pitchFamily="18" charset="0"/>
+                <a:cs typeface="Times New Roman" panose="02020603050405020304" pitchFamily="18" charset="0"/>
+              </a:rPr>
+              <a:t>Функциональные спецификации</a:t>
+            </a:r>
+            <a:endParaRPr lang="ru-RU" sz="2400" b="1" dirty="0">
+              <a:latin typeface="Times New Roman" panose="02020603050405020304" pitchFamily="18" charset="0"/>
+              <a:cs typeface="Times New Roman" panose="02020603050405020304" pitchFamily="18" charset="0"/>
+            </a:endParaRPr>
+          </a:p>
+        </p:txBody>
+      </p:sp>
+      <p:sp>
+        <p:nvSpPr>
+          <p:cNvPr id="11" name="Номер слайда 10"/>
+          <p:cNvSpPr>
+            <a:spLocks noGrp="1"/>
+          </p:cNvSpPr>
+          <p:nvPr>
+            <p:ph type="sldNum" sz="quarter" idx="12"/>
+          </p:nvPr>
+        </p:nvSpPr>
+        <p:spPr/>
+        <p:txBody>
+          <a:bodyPr/>
+          <a:lstStyle/>
+          <a:p>
+            <a:fld id="{97062FB6-5D41-4B3D-BD8B-8E2B9EA26C81}" type="slidenum">
+              <a:rPr lang="ru-RU" smtClean="0"/>
+              <a:t>7</a:t>
+            </a:fld>
+            <a:endParaRPr lang="ru-RU"/>
+          </a:p>
+        </p:txBody>
+      </p:sp>
+      <p:pic>
+        <p:nvPicPr>
+          <p:cNvPr id="17" name="Рисунок 16" descr="Спецификации-Use - case"/>
+          <p:cNvPicPr/>
+          <p:nvPr/>
+        </p:nvPicPr>
+        <p:blipFill>
+          <a:blip r:embed="rId2">
+            <a:extLst>
+              <a:ext uri="{28A0092B-C50C-407E-A947-70E740481C1C}">
+                <a14:useLocalDpi xmlns:a14="http://schemas.microsoft.com/office/drawing/2010/main" val="0"/>
+              </a:ext>
+            </a:extLst>
+          </a:blip>
+          <a:srcRect/>
+          <a:stretch>
+            <a:fillRect/>
+          </a:stretch>
+        </p:blipFill>
+        <p:spPr bwMode="auto">
+          <a:xfrm>
+            <a:off x="2233612" y="627062"/>
+            <a:ext cx="4479315" cy="6094414"/>
+          </a:xfrm>
+          <a:prstGeom prst="rect">
+            <a:avLst/>
+          </a:prstGeom>
+          <a:noFill/>
+          <a:ln>
+            <a:noFill/>
+          </a:ln>
+        </p:spPr>
+      </p:pic>
+    </p:spTree>
+    <p:extLst>
+      <p:ext uri="{BB962C8B-B14F-4D97-AF65-F5344CB8AC3E}">
+        <p14:creationId xmlns:p14="http://schemas.microsoft.com/office/powerpoint/2010/main" val="3331692864"/>
+      </p:ext>
+    </p:extLst>
+  </p:cSld>
+  <p:clrMapOvr>
+    <a:masterClrMapping/>
+  </p:clrMapOvr>
+</p:sld>
+</file>
+
+<file path=ppt/slides/slide8.xml><?xml version="1.0" encoding="utf-8"?>
+<p:sld xmlns:a="http://schemas.openxmlformats.org/drawingml/2006/main" xmlns:r="http://schemas.openxmlformats.org/officeDocument/2006/relationships" xmlns:p="http://schemas.openxmlformats.org/presentationml/2006/main">
+  <p:cSld>
+    <p:spTree>
+      <p:nvGrpSpPr>
+        <p:cNvPr id="1" name=""/>
+        <p:cNvGrpSpPr/>
+        <p:nvPr/>
+      </p:nvGrpSpPr>
+      <p:grpSpPr>
+        <a:xfrm>
+          <a:off x="0" y="0"/>
+          <a:ext cx="0" cy="0"/>
+          <a:chOff x="0" y="0"/>
+          <a:chExt cx="0" cy="0"/>
+        </a:xfrm>
+      </p:grpSpPr>
+      <p:sp>
+        <p:nvSpPr>
+          <p:cNvPr id="2" name="Заголовок 1"/>
+          <p:cNvSpPr>
+            <a:spLocks noGrp="1"/>
+          </p:cNvSpPr>
+          <p:nvPr>
+            <p:ph type="title"/>
+          </p:nvPr>
+        </p:nvSpPr>
+        <p:spPr>
+          <a:xfrm>
+            <a:off x="628650" y="2"/>
+            <a:ext cx="7886700" cy="618565"/>
+          </a:xfrm>
+        </p:spPr>
+        <p:txBody>
+          <a:bodyPr>
+            <a:normAutofit/>
+          </a:bodyPr>
+          <a:lstStyle/>
+          <a:p>
+            <a:pPr algn="ctr"/>
+            <a:r>
+              <a:rPr lang="ru-RU" sz="2400" b="1" dirty="0" smtClean="0">
+                <a:latin typeface="Times New Roman" panose="02020603050405020304" pitchFamily="18" charset="0"/>
+                <a:cs typeface="Times New Roman" panose="02020603050405020304" pitchFamily="18" charset="0"/>
+              </a:rPr>
+              <a:t>Сущност</a:t>
+            </a:r>
+            <a:r>
+              <a:rPr lang="ru-RU" sz="2400" b="1" dirty="0" smtClean="0">
+                <a:latin typeface="Times New Roman" panose="02020603050405020304" pitchFamily="18" charset="0"/>
+                <a:cs typeface="Times New Roman" panose="02020603050405020304" pitchFamily="18" charset="0"/>
+              </a:rPr>
+              <a:t>и и связи системы</a:t>
+            </a:r>
+            <a:endParaRPr lang="ru-RU" sz="2400" b="1" dirty="0">
+              <a:latin typeface="Times New Roman" panose="02020603050405020304" pitchFamily="18" charset="0"/>
+              <a:cs typeface="Times New Roman" panose="02020603050405020304" pitchFamily="18" charset="0"/>
+            </a:endParaRPr>
+          </a:p>
+        </p:txBody>
+      </p:sp>
+      <p:sp>
+        <p:nvSpPr>
+          <p:cNvPr id="11" name="Номер слайда 10"/>
+          <p:cNvSpPr>
+            <a:spLocks noGrp="1"/>
+          </p:cNvSpPr>
+          <p:nvPr>
+            <p:ph type="sldNum" sz="quarter" idx="12"/>
+          </p:nvPr>
+        </p:nvSpPr>
+        <p:spPr/>
+        <p:txBody>
+          <a:bodyPr/>
+          <a:lstStyle/>
+          <a:p>
+            <a:fld id="{97062FB6-5D41-4B3D-BD8B-8E2B9EA26C81}" type="slidenum">
+              <a:rPr lang="ru-RU" smtClean="0"/>
+              <a:t>8</a:t>
+            </a:fld>
+            <a:endParaRPr lang="ru-RU"/>
+          </a:p>
+        </p:txBody>
+      </p:sp>
+      <p:pic>
+        <p:nvPicPr>
+          <p:cNvPr id="2050" name="Picture 2" descr="Спецификации-ER"/>
+          <p:cNvPicPr>
+            <a:picLocks noChangeAspect="1" noChangeArrowheads="1"/>
+          </p:cNvPicPr>
+          <p:nvPr/>
+        </p:nvPicPr>
+        <p:blipFill>
+          <a:blip r:embed="rId2">
+            <a:extLst>
+              <a:ext uri="{28A0092B-C50C-407E-A947-70E740481C1C}">
+                <a14:useLocalDpi xmlns:a14="http://schemas.microsoft.com/office/drawing/2010/main" val="0"/>
+              </a:ext>
+            </a:extLst>
+          </a:blip>
+          <a:srcRect/>
+          <a:stretch>
+            <a:fillRect/>
+          </a:stretch>
+        </p:blipFill>
+        <p:spPr bwMode="auto">
+          <a:xfrm>
+            <a:off x="709484" y="618567"/>
+            <a:ext cx="7725032" cy="5431082"/>
+          </a:xfrm>
+          <a:prstGeom prst="rect">
+            <a:avLst/>
+          </a:prstGeom>
+          <a:noFill/>
+          <a:ln>
+            <a:noFill/>
+          </a:ln>
+          <a:extLst>
+            <a:ext uri="{909E8E84-426E-40DD-AFC4-6F175D3DCCD1}">
+              <a14:hiddenFill xmlns:a14="http://schemas.microsoft.com/office/drawing/2010/main">
+                <a:solidFill>
+                  <a:srgbClr val="FFFFFF"/>
+                </a:solidFill>
+              </a14:hiddenFill>
+            </a:ext>
+            <a:ext uri="{91240B29-F687-4F45-9708-019B960494DF}">
+              <a14:hiddenLine xmlns:a14="http://schemas.microsoft.com/office/drawing/2010/main" w="9525">
+                <a:solidFill>
+                  <a:srgbClr val="000000"/>
+                </a:solidFill>
+                <a:miter lim="800000"/>
+                <a:headEnd/>
+                <a:tailEnd/>
+              </a14:hiddenLine>
+            </a:ext>
+          </a:extLst>
+        </p:spPr>
+      </p:pic>
+    </p:spTree>
+    <p:extLst>
+      <p:ext uri="{BB962C8B-B14F-4D97-AF65-F5344CB8AC3E}">
+        <p14:creationId xmlns:p14="http://schemas.microsoft.com/office/powerpoint/2010/main" val="3695528668"/>
+      </p:ext>
+    </p:extLst>
+  </p:cSld>
+  <p:clrMapOvr>
+    <a:masterClrMapping/>
+  </p:clrMapOvr>
+</p:sld>
+</file>
+
+<file path=ppt/slides/slide9.xml><?xml version="1.0" encoding="utf-8"?>
+<p:sld xmlns:a="http://schemas.openxmlformats.org/drawingml/2006/main" xmlns:r="http://schemas.openxmlformats.org/officeDocument/2006/relationships" xmlns:p="http://schemas.openxmlformats.org/presentationml/2006/main">
+  <p:cSld>
+    <p:spTree>
+      <p:nvGrpSpPr>
+        <p:cNvPr id="1" name=""/>
+        <p:cNvGrpSpPr/>
+        <p:nvPr/>
+      </p:nvGrpSpPr>
+      <p:grpSpPr>
+        <a:xfrm>
+          <a:off x="0" y="0"/>
+          <a:ext cx="0" cy="0"/>
+          <a:chOff x="0" y="0"/>
+          <a:chExt cx="0" cy="0"/>
+        </a:xfrm>
+      </p:grpSpPr>
+      <p:sp>
+        <p:nvSpPr>
+          <p:cNvPr id="2" name="Номер слайда 1"/>
+          <p:cNvSpPr>
+            <a:spLocks noGrp="1"/>
+          </p:cNvSpPr>
+          <p:nvPr>
+            <p:ph type="sldNum" sz="quarter" idx="12"/>
+          </p:nvPr>
+        </p:nvSpPr>
+        <p:spPr/>
+        <p:txBody>
+          <a:bodyPr/>
+          <a:lstStyle/>
+          <a:p>
+            <a:fld id="{97062FB6-5D41-4B3D-BD8B-8E2B9EA26C81}" type="slidenum">
+              <a:rPr lang="ru-RU" smtClean="0"/>
+              <a:t>9</a:t>
+            </a:fld>
+            <a:endParaRPr lang="ru-RU"/>
+          </a:p>
+        </p:txBody>
+      </p:sp>
+      <p:pic>
+        <p:nvPicPr>
+          <p:cNvPr id="1026" name="Picture 2" descr="Компоненты"/>
+          <p:cNvPicPr>
+            <a:picLocks noChangeAspect="1" noChangeArrowheads="1"/>
+          </p:cNvPicPr>
+          <p:nvPr/>
+        </p:nvPicPr>
+        <p:blipFill>
+          <a:blip r:embed="rId2">
+            <a:extLst>
+              <a:ext uri="{28A0092B-C50C-407E-A947-70E740481C1C}">
+                <a14:useLocalDpi xmlns:a14="http://schemas.microsoft.com/office/drawing/2010/main" val="0"/>
+              </a:ext>
+            </a:extLst>
+          </a:blip>
+          <a:srcRect/>
+          <a:stretch>
+            <a:fillRect/>
+          </a:stretch>
+        </p:blipFill>
+        <p:spPr bwMode="auto">
+          <a:xfrm>
+            <a:off x="1596171" y="630886"/>
+            <a:ext cx="6097098" cy="5725465"/>
+          </a:xfrm>
+          <a:prstGeom prst="rect">
+            <a:avLst/>
+          </a:prstGeom>
+          <a:noFill/>
+          <a:ln>
+            <a:noFill/>
+          </a:ln>
+          <a:extLst>
+            <a:ext uri="{909E8E84-426E-40DD-AFC4-6F175D3DCCD1}">
+              <a14:hiddenFill xmlns:a14="http://schemas.microsoft.com/office/drawing/2010/main">
+                <a:solidFill>
+                  <a:srgbClr val="FFFFFF"/>
+                </a:solidFill>
+              </a14:hiddenFill>
+            </a:ext>
+            <a:ext uri="{91240B29-F687-4F45-9708-019B960494DF}">
+              <a14:hiddenLine xmlns:a14="http://schemas.microsoft.com/office/drawing/2010/main" w="9525">
+                <a:solidFill>
+                  <a:srgbClr val="000000"/>
+                </a:solidFill>
+                <a:miter lim="800000"/>
+                <a:headEnd/>
+                <a:tailEnd/>
+              </a14:hiddenLine>
+            </a:ext>
+          </a:extLst>
+        </p:spPr>
+      </p:pic>
+      <p:sp>
+        <p:nvSpPr>
+          <p:cNvPr id="5" name="Заголовок 1"/>
+          <p:cNvSpPr txBox="1">
+            <a:spLocks/>
+          </p:cNvSpPr>
+          <p:nvPr/>
+        </p:nvSpPr>
+        <p:spPr>
+          <a:xfrm>
+            <a:off x="628650" y="2"/>
+            <a:ext cx="7886700" cy="618565"/>
+          </a:xfrm>
+          <a:prstGeom prst="rect">
+            <a:avLst/>
+          </a:prstGeom>
+        </p:spPr>
+        <p:txBody>
+          <a:bodyPr>
+            <a:normAutofit/>
+          </a:bodyPr>
+          <a:lstStyle>
+            <a:lvl1pPr algn="l" defTabSz="914400" rtl="0" eaLnBrk="1" latinLnBrk="0" hangingPunct="1">
+              <a:lnSpc>
+                <a:spcPct val="90000"/>
+              </a:lnSpc>
+              <a:spcBef>
+                <a:spcPct val="0"/>
+              </a:spcBef>
+              <a:buNone/>
+              <a:defRPr sz="4400" kern="1200">
+                <a:solidFill>
+                  <a:schemeClr val="tx1"/>
+                </a:solidFill>
+                <a:latin typeface="+mj-lt"/>
+                <a:ea typeface="+mj-ea"/>
+                <a:cs typeface="+mj-cs"/>
+              </a:defRPr>
+            </a:lvl1pPr>
+          </a:lstStyle>
+          <a:p>
+            <a:pPr algn="ctr"/>
+            <a:r>
+              <a:rPr lang="ru-RU" sz="2400" b="1" dirty="0" smtClean="0">
+                <a:latin typeface="Times New Roman" panose="02020603050405020304" pitchFamily="18" charset="0"/>
+                <a:cs typeface="Times New Roman" panose="02020603050405020304" pitchFamily="18" charset="0"/>
+              </a:rPr>
+              <a:t>Структура системы</a:t>
+            </a:r>
+            <a:endParaRPr lang="ru-RU" sz="2400" b="1" dirty="0">
+              <a:latin typeface="Times New Roman" panose="02020603050405020304" pitchFamily="18" charset="0"/>
+              <a:cs typeface="Times New Roman" panose="02020603050405020304" pitchFamily="18" charset="0"/>
+            </a:endParaRPr>
+          </a:p>
+        </p:txBody>
+      </p:sp>
+    </p:spTree>
+    <p:extLst>
+      <p:ext uri="{BB962C8B-B14F-4D97-AF65-F5344CB8AC3E}">
+        <p14:creationId xmlns:p14="http://schemas.microsoft.com/office/powerpoint/2010/main" val="3824299555"/>
+      </p:ext>
+    </p:extLst>
+  </p:cSld>
+  <p:clrMapOvr>
+    <a:masterClrMapping/>
+  </p:clrMapOvr>
+  <p:transition spd="slow">
+    <p:push dir="u"/>
+  </p:transition>
+</p:sld>
+</file>
+
 <file path=ppt/theme/theme1.xml><?xml version="1.0" encoding="utf-8"?>
 <a:theme xmlns:a="http://schemas.openxmlformats.org/drawingml/2006/main" name="Тема Office">
   <a:themeElements>

--- a/ВКР/ВКР_Василения_21ПГ.pptx
+++ b/ВКР/ВКР_Василения_21ПГ.pptx
@@ -210,7 +210,7 @@
           <a:p>
             <a:fld id="{DC9D613D-7F9B-4E42-A6ED-9695358EDB07}" type="datetimeFigureOut">
               <a:rPr lang="ru-RU" smtClean="0"/>
-              <a:t>26.03.2026</a:t>
+              <a:t>13.05.2026</a:t>
             </a:fld>
             <a:endParaRPr lang="ru-RU"/>
           </a:p>
@@ -608,7 +608,7 @@
           <a:p>
             <a:fld id="{134615A2-30B3-416A-BAD5-95B1BE314A54}" type="datetime1">
               <a:rPr lang="ru-RU" smtClean="0"/>
-              <a:t>26.03.2026</a:t>
+              <a:t>13.05.2026</a:t>
             </a:fld>
             <a:endParaRPr lang="ru-RU"/>
           </a:p>
@@ -781,7 +781,7 @@
           <a:p>
             <a:fld id="{A0474D6D-E951-4260-98B9-66D920AA0D79}" type="datetime1">
               <a:rPr lang="ru-RU" smtClean="0"/>
-              <a:t>26.03.2026</a:t>
+              <a:t>13.05.2026</a:t>
             </a:fld>
             <a:endParaRPr lang="ru-RU"/>
           </a:p>
@@ -964,7 +964,7 @@
           <a:p>
             <a:fld id="{E260E25A-81F6-4E06-8056-5EE8F0636AA9}" type="datetime1">
               <a:rPr lang="ru-RU" smtClean="0"/>
-              <a:t>26.03.2026</a:t>
+              <a:t>13.05.2026</a:t>
             </a:fld>
             <a:endParaRPr lang="ru-RU"/>
           </a:p>
@@ -1137,7 +1137,7 @@
           <a:p>
             <a:fld id="{D26F0890-C51C-4616-BA92-31E98ECE5B68}" type="datetime1">
               <a:rPr lang="ru-RU" smtClean="0"/>
-              <a:t>26.03.2026</a:t>
+              <a:t>13.05.2026</a:t>
             </a:fld>
             <a:endParaRPr lang="ru-RU"/>
           </a:p>
@@ -1384,7 +1384,7 @@
           <a:p>
             <a:fld id="{6F764D2E-4112-4938-891A-6F3A791DFF66}" type="datetime1">
               <a:rPr lang="ru-RU" smtClean="0"/>
-              <a:t>26.03.2026</a:t>
+              <a:t>13.05.2026</a:t>
             </a:fld>
             <a:endParaRPr lang="ru-RU"/>
           </a:p>
@@ -1619,7 +1619,7 @@
           <a:p>
             <a:fld id="{CD8164B3-E779-4292-BEF5-D8CEC6D821A0}" type="datetime1">
               <a:rPr lang="ru-RU" smtClean="0"/>
-              <a:t>26.03.2026</a:t>
+              <a:t>13.05.2026</a:t>
             </a:fld>
             <a:endParaRPr lang="ru-RU"/>
           </a:p>
@@ -1989,7 +1989,7 @@
           <a:p>
             <a:fld id="{CDC9A13E-91ED-4F6D-BBD4-F3D60BCC2C98}" type="datetime1">
               <a:rPr lang="ru-RU" smtClean="0"/>
-              <a:t>26.03.2026</a:t>
+              <a:t>13.05.2026</a:t>
             </a:fld>
             <a:endParaRPr lang="ru-RU"/>
           </a:p>
@@ -2110,7 +2110,7 @@
           <a:p>
             <a:fld id="{23F1224B-DFC9-4FEB-8691-D4DF460BE9AB}" type="datetime1">
               <a:rPr lang="ru-RU" smtClean="0"/>
-              <a:t>26.03.2026</a:t>
+              <a:t>13.05.2026</a:t>
             </a:fld>
             <a:endParaRPr lang="ru-RU"/>
           </a:p>
@@ -2208,7 +2208,7 @@
           <a:p>
             <a:fld id="{1A44754D-5A89-4538-B4B0-681B83032999}" type="datetime1">
               <a:rPr lang="ru-RU" smtClean="0"/>
-              <a:t>26.03.2026</a:t>
+              <a:t>13.05.2026</a:t>
             </a:fld>
             <a:endParaRPr lang="ru-RU"/>
           </a:p>
@@ -2488,7 +2488,7 @@
           <a:p>
             <a:fld id="{E85CE03C-B778-4234-AF27-27A7E8676B7F}" type="datetime1">
               <a:rPr lang="ru-RU" smtClean="0"/>
-              <a:t>26.03.2026</a:t>
+              <a:t>13.05.2026</a:t>
             </a:fld>
             <a:endParaRPr lang="ru-RU"/>
           </a:p>
@@ -2748,7 +2748,7 @@
           <a:p>
             <a:fld id="{346656DA-8ADC-4140-8391-C5372C970DDA}" type="datetime1">
               <a:rPr lang="ru-RU" smtClean="0"/>
-              <a:t>26.03.2026</a:t>
+              <a:t>13.05.2026</a:t>
             </a:fld>
             <a:endParaRPr lang="ru-RU"/>
           </a:p>
@@ -2964,7 +2964,7 @@
           <a:p>
             <a:fld id="{B547DFDD-7F61-483E-A380-F061898845E2}" type="datetime1">
               <a:rPr lang="ru-RU" smtClean="0"/>
-              <a:t>26.03.2026</a:t>
+              <a:t>13.05.2026</a:t>
             </a:fld>
             <a:endParaRPr lang="ru-RU"/>
           </a:p>
@@ -3395,52 +3395,24 @@
           </a:bodyPr>
           <a:lstStyle/>
           <a:p>
-            <a:r>
-              <a:rPr lang="en-US" sz="4000" b="1" dirty="0">
-                <a:latin typeface="Times New Roman" panose="02020603050405020304" pitchFamily="18" charset="0"/>
-                <a:cs typeface="Times New Roman" panose="02020603050405020304" pitchFamily="18" charset="0"/>
-              </a:rPr>
-              <a:t/>
-            </a:r>
             <a:br>
               <a:rPr lang="en-US" sz="4000" b="1" dirty="0">
                 <a:latin typeface="Times New Roman" panose="02020603050405020304" pitchFamily="18" charset="0"/>
                 <a:cs typeface="Times New Roman" panose="02020603050405020304" pitchFamily="18" charset="0"/>
               </a:rPr>
             </a:br>
-            <a:r>
-              <a:rPr lang="en-US" sz="4000" b="1" dirty="0">
-                <a:latin typeface="Times New Roman" panose="02020603050405020304" pitchFamily="18" charset="0"/>
-                <a:cs typeface="Times New Roman" panose="02020603050405020304" pitchFamily="18" charset="0"/>
-              </a:rPr>
-              <a:t/>
-            </a:r>
             <a:br>
               <a:rPr lang="en-US" sz="4000" b="1" dirty="0">
                 <a:latin typeface="Times New Roman" panose="02020603050405020304" pitchFamily="18" charset="0"/>
                 <a:cs typeface="Times New Roman" panose="02020603050405020304" pitchFamily="18" charset="0"/>
               </a:rPr>
             </a:br>
-            <a:r>
-              <a:rPr lang="en-US" sz="4000" b="1" dirty="0">
-                <a:latin typeface="Times New Roman" panose="02020603050405020304" pitchFamily="18" charset="0"/>
-                <a:cs typeface="Times New Roman" panose="02020603050405020304" pitchFamily="18" charset="0"/>
-              </a:rPr>
-              <a:t/>
-            </a:r>
             <a:br>
               <a:rPr lang="en-US" sz="4000" b="1" dirty="0">
                 <a:latin typeface="Times New Roman" panose="02020603050405020304" pitchFamily="18" charset="0"/>
                 <a:cs typeface="Times New Roman" panose="02020603050405020304" pitchFamily="18" charset="0"/>
               </a:rPr>
             </a:br>
-            <a:r>
-              <a:rPr lang="en-US" sz="4000" b="1" dirty="0">
-                <a:latin typeface="Times New Roman" panose="02020603050405020304" pitchFamily="18" charset="0"/>
-                <a:cs typeface="Times New Roman" panose="02020603050405020304" pitchFamily="18" charset="0"/>
-              </a:rPr>
-              <a:t/>
-            </a:r>
             <a:br>
               <a:rPr lang="en-US" sz="4000" b="1" dirty="0">
                 <a:latin typeface="Times New Roman" panose="02020603050405020304" pitchFamily="18" charset="0"/>
@@ -4339,16 +4311,12 @@
           <a:p>
             <a:pPr algn="ctr"/>
             <a:r>
-              <a:rPr lang="ru-RU" sz="2400" b="1" dirty="0" smtClean="0">
+              <a:rPr lang="ru-RU" sz="2400" b="1" dirty="0">
                 <a:latin typeface="Times New Roman" panose="02020603050405020304" pitchFamily="18" charset="0"/>
                 <a:cs typeface="Times New Roman" panose="02020603050405020304" pitchFamily="18" charset="0"/>
               </a:rPr>
               <a:t>Алгоритмы</a:t>
             </a:r>
-            <a:endParaRPr lang="ru-RU" sz="2400" b="1" dirty="0">
-              <a:latin typeface="Times New Roman" panose="02020603050405020304" pitchFamily="18" charset="0"/>
-              <a:cs typeface="Times New Roman" panose="02020603050405020304" pitchFamily="18" charset="0"/>
-            </a:endParaRPr>
           </a:p>
         </p:txBody>
       </p:sp>
@@ -4377,8 +4345,16 @@
       </p:sp>
       <p:pic>
         <p:nvPicPr>
-          <p:cNvPr id="5" name="Рисунок 4" descr="алгоритмы-поиск пары"/>
-          <p:cNvPicPr/>
+          <p:cNvPr id="3" name="Рисунок 2">
+            <a:extLst>
+              <a:ext uri="{FF2B5EF4-FFF2-40B4-BE49-F238E27FC236}">
+                <a16:creationId xmlns:a16="http://schemas.microsoft.com/office/drawing/2014/main" id="{330D2472-25FA-0140-471D-213CB204B6F8}"/>
+              </a:ext>
+            </a:extLst>
+          </p:cNvPr>
+          <p:cNvPicPr>
+            <a:picLocks noChangeAspect="1"/>
+          </p:cNvPicPr>
           <p:nvPr/>
         </p:nvPicPr>
         <p:blipFill>
@@ -4396,8 +4372,8 @@
         </p:blipFill>
         <p:spPr bwMode="auto">
           <a:xfrm>
-            <a:off x="2683852" y="715353"/>
-            <a:ext cx="3774098" cy="5640998"/>
+            <a:off x="3004636" y="523783"/>
+            <a:ext cx="3453314" cy="6063906"/>
           </a:xfrm>
           <a:prstGeom prst="rect">
             <a:avLst/>
@@ -4462,16 +4438,12 @@
           <a:p>
             <a:pPr algn="ctr"/>
             <a:r>
-              <a:rPr lang="ru-RU" sz="2400" b="1" dirty="0" smtClean="0">
+              <a:rPr lang="ru-RU" sz="2400" b="1" dirty="0">
                 <a:latin typeface="Times New Roman" panose="02020603050405020304" pitchFamily="18" charset="0"/>
                 <a:cs typeface="Times New Roman" panose="02020603050405020304" pitchFamily="18" charset="0"/>
               </a:rPr>
               <a:t>Интерфейсы</a:t>
             </a:r>
-            <a:endParaRPr lang="ru-RU" sz="2400" b="1" dirty="0">
-              <a:latin typeface="Times New Roman" panose="02020603050405020304" pitchFamily="18" charset="0"/>
-              <a:cs typeface="Times New Roman" panose="02020603050405020304" pitchFamily="18" charset="0"/>
-            </a:endParaRPr>
           </a:p>
         </p:txBody>
       </p:sp>
@@ -4574,16 +4546,12 @@
           <a:p>
             <a:pPr algn="ctr"/>
             <a:r>
-              <a:rPr lang="ru-RU" sz="2400" b="1" dirty="0" smtClean="0">
+              <a:rPr lang="ru-RU" sz="2400" b="1" dirty="0">
                 <a:latin typeface="Times New Roman" panose="02020603050405020304" pitchFamily="18" charset="0"/>
                 <a:cs typeface="Times New Roman" panose="02020603050405020304" pitchFamily="18" charset="0"/>
               </a:rPr>
               <a:t>Интерфейсы</a:t>
             </a:r>
-            <a:endParaRPr lang="ru-RU" sz="2400" b="1" dirty="0">
-              <a:latin typeface="Times New Roman" panose="02020603050405020304" pitchFamily="18" charset="0"/>
-              <a:cs typeface="Times New Roman" panose="02020603050405020304" pitchFamily="18" charset="0"/>
-            </a:endParaRPr>
           </a:p>
         </p:txBody>
       </p:sp>
@@ -4686,16 +4654,12 @@
           <a:p>
             <a:pPr algn="ctr"/>
             <a:r>
-              <a:rPr lang="ru-RU" sz="2400" b="1" dirty="0" smtClean="0">
+              <a:rPr lang="ru-RU" sz="2400" b="1" dirty="0">
                 <a:latin typeface="Times New Roman" panose="02020603050405020304" pitchFamily="18" charset="0"/>
                 <a:cs typeface="Times New Roman" panose="02020603050405020304" pitchFamily="18" charset="0"/>
               </a:rPr>
               <a:t>Интерфейсы</a:t>
             </a:r>
-            <a:endParaRPr lang="ru-RU" sz="2400" b="1" dirty="0">
-              <a:latin typeface="Times New Roman" panose="02020603050405020304" pitchFamily="18" charset="0"/>
-              <a:cs typeface="Times New Roman" panose="02020603050405020304" pitchFamily="18" charset="0"/>
-            </a:endParaRPr>
           </a:p>
         </p:txBody>
       </p:sp>
@@ -4888,16 +4852,12 @@
           <a:p>
             <a:pPr algn="ctr"/>
             <a:r>
-              <a:rPr lang="ru-RU" sz="2400" b="1" dirty="0" smtClean="0">
+              <a:rPr lang="ru-RU" sz="2400" b="1" dirty="0">
                 <a:latin typeface="Times New Roman" panose="02020603050405020304" pitchFamily="18" charset="0"/>
                 <a:cs typeface="Times New Roman" panose="02020603050405020304" pitchFamily="18" charset="0"/>
               </a:rPr>
               <a:t>Интерфейсы</a:t>
             </a:r>
-            <a:endParaRPr lang="ru-RU" sz="2400" b="1" dirty="0">
-              <a:latin typeface="Times New Roman" panose="02020603050405020304" pitchFamily="18" charset="0"/>
-              <a:cs typeface="Times New Roman" panose="02020603050405020304" pitchFamily="18" charset="0"/>
-            </a:endParaRPr>
           </a:p>
         </p:txBody>
       </p:sp>
@@ -7632,16 +7592,12 @@
           <a:p>
             <a:pPr algn="ctr"/>
             <a:r>
-              <a:rPr lang="ru-RU" sz="2400" b="1" dirty="0" smtClean="0">
+              <a:rPr lang="ru-RU" sz="2400" b="1" dirty="0">
                 <a:latin typeface="Times New Roman" panose="02020603050405020304" pitchFamily="18" charset="0"/>
                 <a:cs typeface="Times New Roman" panose="02020603050405020304" pitchFamily="18" charset="0"/>
               </a:rPr>
               <a:t>Функциональные спецификации</a:t>
             </a:r>
-            <a:endParaRPr lang="ru-RU" sz="2400" b="1" dirty="0">
-              <a:latin typeface="Times New Roman" panose="02020603050405020304" pitchFamily="18" charset="0"/>
-              <a:cs typeface="Times New Roman" panose="02020603050405020304" pitchFamily="18" charset="0"/>
-            </a:endParaRPr>
           </a:p>
         </p:txBody>
       </p:sp>
@@ -7670,8 +7626,16 @@
       </p:sp>
       <p:pic>
         <p:nvPicPr>
-          <p:cNvPr id="17" name="Рисунок 16" descr="Спецификации-Use - case"/>
-          <p:cNvPicPr/>
+          <p:cNvPr id="3" name="Рисунок 2">
+            <a:extLst>
+              <a:ext uri="{FF2B5EF4-FFF2-40B4-BE49-F238E27FC236}">
+                <a16:creationId xmlns:a16="http://schemas.microsoft.com/office/drawing/2014/main" id="{1D2EFE6C-08A1-98EA-7550-8187ED5A726F}"/>
+              </a:ext>
+            </a:extLst>
+          </p:cNvPr>
+          <p:cNvPicPr>
+            <a:picLocks noChangeAspect="1"/>
+          </p:cNvPicPr>
           <p:nvPr/>
         </p:nvPicPr>
         <p:blipFill>
@@ -7689,8 +7653,8 @@
         </p:blipFill>
         <p:spPr bwMode="auto">
           <a:xfrm>
-            <a:off x="2233612" y="627062"/>
-            <a:ext cx="4479315" cy="6094414"/>
+            <a:off x="2322903" y="517868"/>
+            <a:ext cx="4495829" cy="6119781"/>
           </a:xfrm>
           <a:prstGeom prst="rect">
             <a:avLst/>
@@ -7755,23 +7719,12 @@
           <a:p>
             <a:pPr algn="ctr"/>
             <a:r>
-              <a:rPr lang="ru-RU" sz="2400" b="1" dirty="0" smtClean="0">
+              <a:rPr lang="ru-RU" sz="2400" b="1" dirty="0">
                 <a:latin typeface="Times New Roman" panose="02020603050405020304" pitchFamily="18" charset="0"/>
                 <a:cs typeface="Times New Roman" panose="02020603050405020304" pitchFamily="18" charset="0"/>
               </a:rPr>
-              <a:t>Сущност</a:t>
-            </a:r>
-            <a:r>
-              <a:rPr lang="ru-RU" sz="2400" b="1" dirty="0" smtClean="0">
-                <a:latin typeface="Times New Roman" panose="02020603050405020304" pitchFamily="18" charset="0"/>
-                <a:cs typeface="Times New Roman" panose="02020603050405020304" pitchFamily="18" charset="0"/>
-              </a:rPr>
-              <a:t>и и связи системы</a:t>
-            </a:r>
-            <a:endParaRPr lang="ru-RU" sz="2400" b="1" dirty="0">
-              <a:latin typeface="Times New Roman" panose="02020603050405020304" pitchFamily="18" charset="0"/>
-              <a:cs typeface="Times New Roman" panose="02020603050405020304" pitchFamily="18" charset="0"/>
-            </a:endParaRPr>
+              <a:t>Сущности и связи системы</a:t>
+            </a:r>
           </a:p>
         </p:txBody>
       </p:sp>
@@ -7800,9 +7753,15 @@
       </p:sp>
       <p:pic>
         <p:nvPicPr>
-          <p:cNvPr id="2050" name="Picture 2" descr="Спецификации-ER"/>
+          <p:cNvPr id="3" name="Рисунок 2">
+            <a:extLst>
+              <a:ext uri="{FF2B5EF4-FFF2-40B4-BE49-F238E27FC236}">
+                <a16:creationId xmlns:a16="http://schemas.microsoft.com/office/drawing/2014/main" id="{735628FA-9C76-0A9A-01AA-18C8D61B90F1}"/>
+              </a:ext>
+            </a:extLst>
+          </p:cNvPr>
           <p:cNvPicPr>
-            <a:picLocks noChangeAspect="1" noChangeArrowheads="1"/>
+            <a:picLocks noChangeAspect="1"/>
           </p:cNvPicPr>
           <p:nvPr/>
         </p:nvPicPr>
@@ -7821,8 +7780,8 @@
         </p:blipFill>
         <p:spPr bwMode="auto">
           <a:xfrm>
-            <a:off x="709484" y="618567"/>
-            <a:ext cx="7725032" cy="5431082"/>
+            <a:off x="780633" y="763480"/>
+            <a:ext cx="7734717" cy="5437891"/>
           </a:xfrm>
           <a:prstGeom prst="rect">
             <a:avLst/>
@@ -7831,25 +7790,6 @@
           <a:ln>
             <a:noFill/>
           </a:ln>
-          <a:extLst>
-            <a:ext uri="{909E8E84-426E-40DD-AFC4-6F175D3DCCD1}">
-              <a14:hiddenFill xmlns:a14="http://schemas.microsoft.com/office/drawing/2010/main">
-                <a:solidFill>
-                  <a:srgbClr val="FFFFFF"/>
-                </a:solidFill>
-              </a14:hiddenFill>
-            </a:ext>
-            <a:ext uri="{91240B29-F687-4F45-9708-019B960494DF}">
-              <a14:hiddenLine xmlns:a14="http://schemas.microsoft.com/office/drawing/2010/main" w="9525">
-                <a:solidFill>
-                  <a:srgbClr val="000000"/>
-                </a:solidFill>
-                <a:miter lim="800000"/>
-                <a:headEnd/>
-                <a:tailEnd/>
-              </a14:hiddenLine>
-            </a:ext>
-          </a:extLst>
         </p:spPr>
       </p:pic>
     </p:spTree>
@@ -8002,16 +7942,12 @@
           <a:p>
             <a:pPr algn="ctr"/>
             <a:r>
-              <a:rPr lang="ru-RU" sz="2400" b="1" dirty="0" smtClean="0">
+              <a:rPr lang="ru-RU" sz="2400" b="1" dirty="0">
                 <a:latin typeface="Times New Roman" panose="02020603050405020304" pitchFamily="18" charset="0"/>
                 <a:cs typeface="Times New Roman" panose="02020603050405020304" pitchFamily="18" charset="0"/>
               </a:rPr>
               <a:t>Структура системы</a:t>
             </a:r>
-            <a:endParaRPr lang="ru-RU" sz="2400" b="1" dirty="0">
-              <a:latin typeface="Times New Roman" panose="02020603050405020304" pitchFamily="18" charset="0"/>
-              <a:cs typeface="Times New Roman" panose="02020603050405020304" pitchFamily="18" charset="0"/>
-            </a:endParaRPr>
           </a:p>
         </p:txBody>
       </p:sp>

--- a/ВКР/ВКР_Василения_21ПГ.pptx
+++ b/ВКР/ВКР_Василения_21ПГ.pptx
@@ -5,7 +5,7 @@
     <p:sldMasterId id="2147483660" r:id="rId1"/>
   </p:sldMasterIdLst>
   <p:notesMasterIdLst>
-    <p:notesMasterId r:id="rId16"/>
+    <p:notesMasterId r:id="rId20"/>
   </p:notesMasterIdLst>
   <p:sldIdLst>
     <p:sldId id="283" r:id="rId2"/>
@@ -17,11 +17,15 @@
     <p:sldId id="291" r:id="rId8"/>
     <p:sldId id="292" r:id="rId9"/>
     <p:sldId id="290" r:id="rId10"/>
-    <p:sldId id="293" r:id="rId11"/>
-    <p:sldId id="294" r:id="rId12"/>
-    <p:sldId id="295" r:id="rId13"/>
-    <p:sldId id="296" r:id="rId14"/>
-    <p:sldId id="297" r:id="rId15"/>
+    <p:sldId id="298" r:id="rId11"/>
+    <p:sldId id="293" r:id="rId12"/>
+    <p:sldId id="299" r:id="rId13"/>
+    <p:sldId id="294" r:id="rId14"/>
+    <p:sldId id="295" r:id="rId15"/>
+    <p:sldId id="296" r:id="rId16"/>
+    <p:sldId id="297" r:id="rId17"/>
+    <p:sldId id="300" r:id="rId18"/>
+    <p:sldId id="301" r:id="rId19"/>
   </p:sldIdLst>
   <p:sldSz cx="9144000" cy="6858000" type="screen4x3"/>
   <p:notesSz cx="6858000" cy="9144000"/>
@@ -210,7 +214,7 @@
           <a:p>
             <a:fld id="{DC9D613D-7F9B-4E42-A6ED-9695358EDB07}" type="datetimeFigureOut">
               <a:rPr lang="ru-RU" smtClean="0"/>
-              <a:t>13.05.2026</a:t>
+              <a:t>18.05.2026</a:t>
             </a:fld>
             <a:endParaRPr lang="ru-RU"/>
           </a:p>
@@ -608,7 +612,7 @@
           <a:p>
             <a:fld id="{134615A2-30B3-416A-BAD5-95B1BE314A54}" type="datetime1">
               <a:rPr lang="ru-RU" smtClean="0"/>
-              <a:t>13.05.2026</a:t>
+              <a:t>18.05.2026</a:t>
             </a:fld>
             <a:endParaRPr lang="ru-RU"/>
           </a:p>
@@ -781,7 +785,7 @@
           <a:p>
             <a:fld id="{A0474D6D-E951-4260-98B9-66D920AA0D79}" type="datetime1">
               <a:rPr lang="ru-RU" smtClean="0"/>
-              <a:t>13.05.2026</a:t>
+              <a:t>18.05.2026</a:t>
             </a:fld>
             <a:endParaRPr lang="ru-RU"/>
           </a:p>
@@ -964,7 +968,7 @@
           <a:p>
             <a:fld id="{E260E25A-81F6-4E06-8056-5EE8F0636AA9}" type="datetime1">
               <a:rPr lang="ru-RU" smtClean="0"/>
-              <a:t>13.05.2026</a:t>
+              <a:t>18.05.2026</a:t>
             </a:fld>
             <a:endParaRPr lang="ru-RU"/>
           </a:p>
@@ -1137,7 +1141,7 @@
           <a:p>
             <a:fld id="{D26F0890-C51C-4616-BA92-31E98ECE5B68}" type="datetime1">
               <a:rPr lang="ru-RU" smtClean="0"/>
-              <a:t>13.05.2026</a:t>
+              <a:t>18.05.2026</a:t>
             </a:fld>
             <a:endParaRPr lang="ru-RU"/>
           </a:p>
@@ -1384,7 +1388,7 @@
           <a:p>
             <a:fld id="{6F764D2E-4112-4938-891A-6F3A791DFF66}" type="datetime1">
               <a:rPr lang="ru-RU" smtClean="0"/>
-              <a:t>13.05.2026</a:t>
+              <a:t>18.05.2026</a:t>
             </a:fld>
             <a:endParaRPr lang="ru-RU"/>
           </a:p>
@@ -1619,7 +1623,7 @@
           <a:p>
             <a:fld id="{CD8164B3-E779-4292-BEF5-D8CEC6D821A0}" type="datetime1">
               <a:rPr lang="ru-RU" smtClean="0"/>
-              <a:t>13.05.2026</a:t>
+              <a:t>18.05.2026</a:t>
             </a:fld>
             <a:endParaRPr lang="ru-RU"/>
           </a:p>
@@ -1989,7 +1993,7 @@
           <a:p>
             <a:fld id="{CDC9A13E-91ED-4F6D-BBD4-F3D60BCC2C98}" type="datetime1">
               <a:rPr lang="ru-RU" smtClean="0"/>
-              <a:t>13.05.2026</a:t>
+              <a:t>18.05.2026</a:t>
             </a:fld>
             <a:endParaRPr lang="ru-RU"/>
           </a:p>
@@ -2110,7 +2114,7 @@
           <a:p>
             <a:fld id="{23F1224B-DFC9-4FEB-8691-D4DF460BE9AB}" type="datetime1">
               <a:rPr lang="ru-RU" smtClean="0"/>
-              <a:t>13.05.2026</a:t>
+              <a:t>18.05.2026</a:t>
             </a:fld>
             <a:endParaRPr lang="ru-RU"/>
           </a:p>
@@ -2208,7 +2212,7 @@
           <a:p>
             <a:fld id="{1A44754D-5A89-4538-B4B0-681B83032999}" type="datetime1">
               <a:rPr lang="ru-RU" smtClean="0"/>
-              <a:t>13.05.2026</a:t>
+              <a:t>18.05.2026</a:t>
             </a:fld>
             <a:endParaRPr lang="ru-RU"/>
           </a:p>
@@ -2488,7 +2492,7 @@
           <a:p>
             <a:fld id="{E85CE03C-B778-4234-AF27-27A7E8676B7F}" type="datetime1">
               <a:rPr lang="ru-RU" smtClean="0"/>
-              <a:t>13.05.2026</a:t>
+              <a:t>18.05.2026</a:t>
             </a:fld>
             <a:endParaRPr lang="ru-RU"/>
           </a:p>
@@ -2748,7 +2752,7 @@
           <a:p>
             <a:fld id="{346656DA-8ADC-4140-8391-C5372C970DDA}" type="datetime1">
               <a:rPr lang="ru-RU" smtClean="0"/>
-              <a:t>13.05.2026</a:t>
+              <a:t>18.05.2026</a:t>
             </a:fld>
             <a:endParaRPr lang="ru-RU"/>
           </a:p>
@@ -2964,7 +2968,7 @@
           <a:p>
             <a:fld id="{B547DFDD-7F61-483E-A380-F061898845E2}" type="datetime1">
               <a:rPr lang="ru-RU" smtClean="0"/>
-              <a:t>13.05.2026</a:t>
+              <a:t>18.05.2026</a:t>
             </a:fld>
             <a:endParaRPr lang="ru-RU"/>
           </a:p>
@@ -4275,6 +4279,173 @@
   <p:cSld>
     <p:spTree>
       <p:nvGrpSpPr>
+        <p:cNvPr id="1" name="">
+          <a:extLst>
+            <a:ext uri="{FF2B5EF4-FFF2-40B4-BE49-F238E27FC236}">
+              <a16:creationId xmlns:a16="http://schemas.microsoft.com/office/drawing/2014/main" id="{E764D12D-C929-49F4-876E-681D441D1F70}"/>
+            </a:ext>
+          </a:extLst>
+        </p:cNvPr>
+        <p:cNvGrpSpPr/>
+        <p:nvPr/>
+      </p:nvGrpSpPr>
+      <p:grpSpPr>
+        <a:xfrm>
+          <a:off x="0" y="0"/>
+          <a:ext cx="0" cy="0"/>
+          <a:chOff x="0" y="0"/>
+          <a:chExt cx="0" cy="0"/>
+        </a:xfrm>
+      </p:grpSpPr>
+      <p:sp>
+        <p:nvSpPr>
+          <p:cNvPr id="2" name="Номер слайда 1">
+            <a:extLst>
+              <a:ext uri="{FF2B5EF4-FFF2-40B4-BE49-F238E27FC236}">
+                <a16:creationId xmlns:a16="http://schemas.microsoft.com/office/drawing/2014/main" id="{F3FDBA77-D7BE-30A9-4164-527BAC27D5B7}"/>
+              </a:ext>
+            </a:extLst>
+          </p:cNvPr>
+          <p:cNvSpPr>
+            <a:spLocks noGrp="1"/>
+          </p:cNvSpPr>
+          <p:nvPr>
+            <p:ph type="sldNum" sz="quarter" idx="12"/>
+          </p:nvPr>
+        </p:nvSpPr>
+        <p:spPr/>
+        <p:txBody>
+          <a:bodyPr/>
+          <a:lstStyle/>
+          <a:p>
+            <a:fld id="{97062FB6-5D41-4B3D-BD8B-8E2B9EA26C81}" type="slidenum">
+              <a:rPr lang="ru-RU" smtClean="0"/>
+              <a:t>10</a:t>
+            </a:fld>
+            <a:endParaRPr lang="ru-RU"/>
+          </a:p>
+        </p:txBody>
+      </p:sp>
+      <p:sp>
+        <p:nvSpPr>
+          <p:cNvPr id="5" name="Заголовок 1">
+            <a:extLst>
+              <a:ext uri="{FF2B5EF4-FFF2-40B4-BE49-F238E27FC236}">
+                <a16:creationId xmlns:a16="http://schemas.microsoft.com/office/drawing/2014/main" id="{8ECBC7E8-E609-D1C0-6ED0-FE21D5242256}"/>
+              </a:ext>
+            </a:extLst>
+          </p:cNvPr>
+          <p:cNvSpPr txBox="1">
+            <a:spLocks/>
+          </p:cNvSpPr>
+          <p:nvPr/>
+        </p:nvSpPr>
+        <p:spPr>
+          <a:xfrm>
+            <a:off x="628650" y="2"/>
+            <a:ext cx="7886700" cy="618565"/>
+          </a:xfrm>
+          <a:prstGeom prst="rect">
+            <a:avLst/>
+          </a:prstGeom>
+        </p:spPr>
+        <p:txBody>
+          <a:bodyPr>
+            <a:normAutofit/>
+          </a:bodyPr>
+          <a:lstStyle>
+            <a:lvl1pPr algn="l" defTabSz="914400" rtl="0" eaLnBrk="1" latinLnBrk="0" hangingPunct="1">
+              <a:lnSpc>
+                <a:spcPct val="90000"/>
+              </a:lnSpc>
+              <a:spcBef>
+                <a:spcPct val="0"/>
+              </a:spcBef>
+              <a:buNone/>
+              <a:defRPr sz="4400" kern="1200">
+                <a:solidFill>
+                  <a:schemeClr val="tx1"/>
+                </a:solidFill>
+                <a:latin typeface="+mj-lt"/>
+                <a:ea typeface="+mj-ea"/>
+                <a:cs typeface="+mj-cs"/>
+              </a:defRPr>
+            </a:lvl1pPr>
+          </a:lstStyle>
+          <a:p>
+            <a:pPr algn="ctr"/>
+            <a:r>
+              <a:rPr lang="ru-RU" sz="2400" b="1" dirty="0">
+                <a:latin typeface="Times New Roman" panose="02020603050405020304" pitchFamily="18" charset="0"/>
+                <a:cs typeface="Times New Roman" panose="02020603050405020304" pitchFamily="18" charset="0"/>
+              </a:rPr>
+              <a:t>Поведенческая спецификация подсистемы</a:t>
+            </a:r>
+          </a:p>
+        </p:txBody>
+      </p:sp>
+      <p:pic>
+        <p:nvPicPr>
+          <p:cNvPr id="3" name="Рисунок 2">
+            <a:extLst>
+              <a:ext uri="{FF2B5EF4-FFF2-40B4-BE49-F238E27FC236}">
+                <a16:creationId xmlns:a16="http://schemas.microsoft.com/office/drawing/2014/main" id="{EEA31BC0-6F80-2F30-47F6-85DE0202AD0D}"/>
+              </a:ext>
+            </a:extLst>
+          </p:cNvPr>
+          <p:cNvPicPr>
+            <a:picLocks noChangeAspect="1"/>
+          </p:cNvPicPr>
+          <p:nvPr/>
+        </p:nvPicPr>
+        <p:blipFill>
+          <a:blip r:embed="rId2">
+            <a:extLst>
+              <a:ext uri="{28A0092B-C50C-407E-A947-70E740481C1C}">
+                <a14:useLocalDpi xmlns:a14="http://schemas.microsoft.com/office/drawing/2010/main" val="0"/>
+              </a:ext>
+            </a:extLst>
+          </a:blip>
+          <a:srcRect/>
+          <a:stretch>
+            <a:fillRect/>
+          </a:stretch>
+        </p:blipFill>
+        <p:spPr bwMode="auto">
+          <a:xfrm>
+            <a:off x="965783" y="1550770"/>
+            <a:ext cx="7549567" cy="3756459"/>
+          </a:xfrm>
+          <a:prstGeom prst="rect">
+            <a:avLst/>
+          </a:prstGeom>
+          <a:noFill/>
+          <a:ln>
+            <a:noFill/>
+          </a:ln>
+        </p:spPr>
+      </p:pic>
+    </p:spTree>
+    <p:extLst>
+      <p:ext uri="{BB962C8B-B14F-4D97-AF65-F5344CB8AC3E}">
+        <p14:creationId xmlns:p14="http://schemas.microsoft.com/office/powerpoint/2010/main" val="2811140531"/>
+      </p:ext>
+    </p:extLst>
+  </p:cSld>
+  <p:clrMapOvr>
+    <a:masterClrMapping/>
+  </p:clrMapOvr>
+  <p:transition spd="slow">
+    <p:push dir="u"/>
+  </p:transition>
+</p:sld>
+</file>
+
+<file path=ppt/slides/slide11.xml><?xml version="1.0" encoding="utf-8"?>
+<p:sld xmlns:a="http://schemas.openxmlformats.org/drawingml/2006/main" xmlns:r="http://schemas.openxmlformats.org/officeDocument/2006/relationships" xmlns:p="http://schemas.openxmlformats.org/presentationml/2006/main">
+  <p:cSld>
+    <p:spTree>
+      <p:nvGrpSpPr>
         <p:cNvPr id="1" name=""/>
         <p:cNvGrpSpPr/>
         <p:nvPr/>
@@ -4300,7 +4471,7 @@
         <p:spPr>
           <a:xfrm>
             <a:off x="628650" y="2"/>
-            <a:ext cx="7886700" cy="618565"/>
+            <a:ext cx="7886700" cy="834499"/>
           </a:xfrm>
         </p:spPr>
         <p:txBody>
@@ -4315,7 +4486,7 @@
                 <a:latin typeface="Times New Roman" panose="02020603050405020304" pitchFamily="18" charset="0"/>
                 <a:cs typeface="Times New Roman" panose="02020603050405020304" pitchFamily="18" charset="0"/>
               </a:rPr>
-              <a:t>Алгоритмы</a:t>
+              <a:t>Алгоритм формирования страницы журнала посещаемости для группы на текущую дату </a:t>
             </a:r>
           </a:p>
         </p:txBody>
@@ -4337,7 +4508,7 @@
           <a:p>
             <a:fld id="{97062FB6-5D41-4B3D-BD8B-8E2B9EA26C81}" type="slidenum">
               <a:rPr lang="ru-RU" smtClean="0"/>
-              <a:t>10</a:t>
+              <a:t>11</a:t>
             </a:fld>
             <a:endParaRPr lang="ru-RU"/>
           </a:p>
@@ -4372,8 +4543,8 @@
         </p:blipFill>
         <p:spPr bwMode="auto">
           <a:xfrm>
-            <a:off x="3004636" y="523783"/>
-            <a:ext cx="3453314" cy="6063906"/>
+            <a:off x="3004636" y="834501"/>
+            <a:ext cx="3276364" cy="5753188"/>
           </a:xfrm>
           <a:prstGeom prst="rect">
             <a:avLst/>
@@ -4397,7 +4568,152 @@
 </p:sld>
 </file>
 
-<file path=ppt/slides/slide11.xml><?xml version="1.0" encoding="utf-8"?>
+<file path=ppt/slides/slide12.xml><?xml version="1.0" encoding="utf-8"?>
+<p:sld xmlns:a="http://schemas.openxmlformats.org/drawingml/2006/main" xmlns:r="http://schemas.openxmlformats.org/officeDocument/2006/relationships" xmlns:p="http://schemas.openxmlformats.org/presentationml/2006/main">
+  <p:cSld>
+    <p:spTree>
+      <p:nvGrpSpPr>
+        <p:cNvPr id="1" name="">
+          <a:extLst>
+            <a:ext uri="{FF2B5EF4-FFF2-40B4-BE49-F238E27FC236}">
+              <a16:creationId xmlns:a16="http://schemas.microsoft.com/office/drawing/2014/main" id="{B19C96BF-47D5-2CBF-75A3-B2FFFDC0CC94}"/>
+            </a:ext>
+          </a:extLst>
+        </p:cNvPr>
+        <p:cNvGrpSpPr/>
+        <p:nvPr/>
+      </p:nvGrpSpPr>
+      <p:grpSpPr>
+        <a:xfrm>
+          <a:off x="0" y="0"/>
+          <a:ext cx="0" cy="0"/>
+          <a:chOff x="0" y="0"/>
+          <a:chExt cx="0" cy="0"/>
+        </a:xfrm>
+      </p:grpSpPr>
+      <p:sp>
+        <p:nvSpPr>
+          <p:cNvPr id="2" name="Заголовок 1">
+            <a:extLst>
+              <a:ext uri="{FF2B5EF4-FFF2-40B4-BE49-F238E27FC236}">
+                <a16:creationId xmlns:a16="http://schemas.microsoft.com/office/drawing/2014/main" id="{DB1584EC-BAEC-8E3C-E0DA-596639A23B91}"/>
+              </a:ext>
+            </a:extLst>
+          </p:cNvPr>
+          <p:cNvSpPr>
+            <a:spLocks noGrp="1"/>
+          </p:cNvSpPr>
+          <p:nvPr>
+            <p:ph type="title"/>
+          </p:nvPr>
+        </p:nvSpPr>
+        <p:spPr>
+          <a:xfrm>
+            <a:off x="628650" y="2"/>
+            <a:ext cx="7886700" cy="834499"/>
+          </a:xfrm>
+        </p:spPr>
+        <p:txBody>
+          <a:bodyPr>
+            <a:normAutofit/>
+          </a:bodyPr>
+          <a:lstStyle/>
+          <a:p>
+            <a:pPr algn="ctr"/>
+            <a:r>
+              <a:rPr lang="ru-RU" sz="2400" b="1" dirty="0">
+                <a:latin typeface="Times New Roman" panose="02020603050405020304" pitchFamily="18" charset="0"/>
+                <a:cs typeface="Times New Roman" panose="02020603050405020304" pitchFamily="18" charset="0"/>
+              </a:rPr>
+              <a:t>Алгоритм поиска нужного занятия на текущий момент времени, либо по указанному номеру</a:t>
+            </a:r>
+          </a:p>
+        </p:txBody>
+      </p:sp>
+      <p:sp>
+        <p:nvSpPr>
+          <p:cNvPr id="11" name="Номер слайда 10">
+            <a:extLst>
+              <a:ext uri="{FF2B5EF4-FFF2-40B4-BE49-F238E27FC236}">
+                <a16:creationId xmlns:a16="http://schemas.microsoft.com/office/drawing/2014/main" id="{E13F4D6E-4DAE-A284-8124-E6302AD628E6}"/>
+              </a:ext>
+            </a:extLst>
+          </p:cNvPr>
+          <p:cNvSpPr>
+            <a:spLocks noGrp="1"/>
+          </p:cNvSpPr>
+          <p:nvPr>
+            <p:ph type="sldNum" sz="quarter" idx="12"/>
+          </p:nvPr>
+        </p:nvSpPr>
+        <p:spPr/>
+        <p:txBody>
+          <a:bodyPr/>
+          <a:lstStyle/>
+          <a:p>
+            <a:fld id="{97062FB6-5D41-4B3D-BD8B-8E2B9EA26C81}" type="slidenum">
+              <a:rPr lang="ru-RU" smtClean="0"/>
+              <a:t>12</a:t>
+            </a:fld>
+            <a:endParaRPr lang="ru-RU"/>
+          </a:p>
+        </p:txBody>
+      </p:sp>
+      <p:pic>
+        <p:nvPicPr>
+          <p:cNvPr id="4" name="Рисунок 3">
+            <a:extLst>
+              <a:ext uri="{FF2B5EF4-FFF2-40B4-BE49-F238E27FC236}">
+                <a16:creationId xmlns:a16="http://schemas.microsoft.com/office/drawing/2014/main" id="{2954F1AB-D4F3-C0C9-FDD5-77DACEF33BBB}"/>
+              </a:ext>
+            </a:extLst>
+          </p:cNvPr>
+          <p:cNvPicPr>
+            <a:picLocks noChangeAspect="1"/>
+          </p:cNvPicPr>
+          <p:nvPr/>
+        </p:nvPicPr>
+        <p:blipFill>
+          <a:blip r:embed="rId2">
+            <a:extLst>
+              <a:ext uri="{28A0092B-C50C-407E-A947-70E740481C1C}">
+                <a14:useLocalDpi xmlns:a14="http://schemas.microsoft.com/office/drawing/2010/main" val="0"/>
+              </a:ext>
+            </a:extLst>
+          </a:blip>
+          <a:srcRect/>
+          <a:stretch>
+            <a:fillRect/>
+          </a:stretch>
+        </p:blipFill>
+        <p:spPr bwMode="auto">
+          <a:xfrm>
+            <a:off x="2803764" y="834501"/>
+            <a:ext cx="3245770" cy="5699464"/>
+          </a:xfrm>
+          <a:prstGeom prst="rect">
+            <a:avLst/>
+          </a:prstGeom>
+          <a:noFill/>
+          <a:ln>
+            <a:noFill/>
+          </a:ln>
+        </p:spPr>
+      </p:pic>
+    </p:spTree>
+    <p:extLst>
+      <p:ext uri="{BB962C8B-B14F-4D97-AF65-F5344CB8AC3E}">
+        <p14:creationId xmlns:p14="http://schemas.microsoft.com/office/powerpoint/2010/main" val="1350285067"/>
+      </p:ext>
+    </p:extLst>
+  </p:cSld>
+  <p:clrMapOvr>
+    <a:masterClrMapping/>
+  </p:clrMapOvr>
+</p:sld>
+</file>
+
+<file path=ppt/slides/slide13.xml><?xml version="1.0" encoding="utf-8"?>
 <p:sld xmlns:a="http://schemas.openxmlformats.org/drawingml/2006/main" xmlns:r="http://schemas.openxmlformats.org/officeDocument/2006/relationships" xmlns:p="http://schemas.openxmlformats.org/presentationml/2006/main">
   <p:cSld>
     <p:spTree>
@@ -4442,7 +4758,7 @@
                 <a:latin typeface="Times New Roman" panose="02020603050405020304" pitchFamily="18" charset="0"/>
                 <a:cs typeface="Times New Roman" panose="02020603050405020304" pitchFamily="18" charset="0"/>
               </a:rPr>
-              <a:t>Интерфейсы</a:t>
+              <a:t>Интерфейс главной страницы</a:t>
             </a:r>
           </a:p>
         </p:txBody>
@@ -4464,7 +4780,7 @@
           <a:p>
             <a:fld id="{97062FB6-5D41-4B3D-BD8B-8E2B9EA26C81}" type="slidenum">
               <a:rPr lang="ru-RU" smtClean="0"/>
-              <a:t>11</a:t>
+              <a:t>13</a:t>
             </a:fld>
             <a:endParaRPr lang="ru-RU"/>
           </a:p>
@@ -4505,7 +4821,7 @@
 </p:sld>
 </file>
 
-<file path=ppt/slides/slide12.xml><?xml version="1.0" encoding="utf-8"?>
+<file path=ppt/slides/slide14.xml><?xml version="1.0" encoding="utf-8"?>
 <p:sld xmlns:a="http://schemas.openxmlformats.org/drawingml/2006/main" xmlns:r="http://schemas.openxmlformats.org/officeDocument/2006/relationships" xmlns:p="http://schemas.openxmlformats.org/presentationml/2006/main">
   <p:cSld>
     <p:spTree>
@@ -4550,7 +4866,7 @@
                 <a:latin typeface="Times New Roman" panose="02020603050405020304" pitchFamily="18" charset="0"/>
                 <a:cs typeface="Times New Roman" panose="02020603050405020304" pitchFamily="18" charset="0"/>
               </a:rPr>
-              <a:t>Интерфейсы</a:t>
+              <a:t>Интерфейс страницы журнала посещаемости</a:t>
             </a:r>
           </a:p>
         </p:txBody>
@@ -4572,7 +4888,7 @@
           <a:p>
             <a:fld id="{97062FB6-5D41-4B3D-BD8B-8E2B9EA26C81}" type="slidenum">
               <a:rPr lang="ru-RU" smtClean="0"/>
-              <a:t>12</a:t>
+              <a:t>14</a:t>
             </a:fld>
             <a:endParaRPr lang="ru-RU"/>
           </a:p>
@@ -4613,7 +4929,7 @@
 </p:sld>
 </file>
 
-<file path=ppt/slides/slide13.xml><?xml version="1.0" encoding="utf-8"?>
+<file path=ppt/slides/slide15.xml><?xml version="1.0" encoding="utf-8"?>
 <p:sld xmlns:a="http://schemas.openxmlformats.org/drawingml/2006/main" xmlns:r="http://schemas.openxmlformats.org/officeDocument/2006/relationships" xmlns:p="http://schemas.openxmlformats.org/presentationml/2006/main">
   <p:cSld>
     <p:spTree>
@@ -4658,7 +4974,7 @@
                 <a:latin typeface="Times New Roman" panose="02020603050405020304" pitchFamily="18" charset="0"/>
                 <a:cs typeface="Times New Roman" panose="02020603050405020304" pitchFamily="18" charset="0"/>
               </a:rPr>
-              <a:t>Интерфейсы</a:t>
+              <a:t>Интерфейс страницы просмотра статистики</a:t>
             </a:r>
           </a:p>
         </p:txBody>
@@ -4680,7 +4996,7 @@
           <a:p>
             <a:fld id="{97062FB6-5D41-4B3D-BD8B-8E2B9EA26C81}" type="slidenum">
               <a:rPr lang="ru-RU" smtClean="0"/>
-              <a:t>13</a:t>
+              <a:t>15</a:t>
             </a:fld>
             <a:endParaRPr lang="ru-RU"/>
           </a:p>
@@ -4743,7 +5059,7 @@
 </p:sld>
 </file>
 
-<file path=ppt/slides/slide14.xml><?xml version="1.0" encoding="utf-8"?>
+<file path=ppt/slides/slide16.xml><?xml version="1.0" encoding="utf-8"?>
 <p:sld xmlns:a="http://schemas.openxmlformats.org/drawingml/2006/main" xmlns:r="http://schemas.openxmlformats.org/officeDocument/2006/relationships" xmlns:p="http://schemas.openxmlformats.org/presentationml/2006/main">
   <p:cSld>
     <p:spTree>
@@ -4777,7 +5093,7 @@
           <a:p>
             <a:fld id="{97062FB6-5D41-4B3D-BD8B-8E2B9EA26C81}" type="slidenum">
               <a:rPr lang="ru-RU" smtClean="0"/>
-              <a:t>14</a:t>
+              <a:t>16</a:t>
             </a:fld>
             <a:endParaRPr lang="ru-RU"/>
           </a:p>
@@ -4801,7 +5117,7 @@
         </p:blipFill>
         <p:spPr>
           <a:xfrm>
-            <a:off x="942468" y="2300844"/>
+            <a:off x="942468" y="1635019"/>
             <a:ext cx="7259063" cy="3400900"/>
           </a:xfrm>
           <a:prstGeom prst="rect">
@@ -4856,7 +5172,7 @@
                 <a:latin typeface="Times New Roman" panose="02020603050405020304" pitchFamily="18" charset="0"/>
                 <a:cs typeface="Times New Roman" panose="02020603050405020304" pitchFamily="18" charset="0"/>
               </a:rPr>
-              <a:t>Интерфейсы</a:t>
+              <a:t>Интерфейс страницы деления на подгруппы</a:t>
             </a:r>
           </a:p>
         </p:txBody>
@@ -4865,6 +5181,439 @@
     <p:extLst>
       <p:ext uri="{BB962C8B-B14F-4D97-AF65-F5344CB8AC3E}">
         <p14:creationId xmlns:p14="http://schemas.microsoft.com/office/powerpoint/2010/main" val="1268620346"/>
+      </p:ext>
+    </p:extLst>
+  </p:cSld>
+  <p:clrMapOvr>
+    <a:masterClrMapping/>
+  </p:clrMapOvr>
+  <p:transition spd="slow">
+    <p:push dir="u"/>
+  </p:transition>
+</p:sld>
+</file>
+
+<file path=ppt/slides/slide17.xml><?xml version="1.0" encoding="utf-8"?>
+<p:sld xmlns:a="http://schemas.openxmlformats.org/drawingml/2006/main" xmlns:r="http://schemas.openxmlformats.org/officeDocument/2006/relationships" xmlns:p="http://schemas.openxmlformats.org/presentationml/2006/main">
+  <p:cSld>
+    <p:spTree>
+      <p:nvGrpSpPr>
+        <p:cNvPr id="1" name="">
+          <a:extLst>
+            <a:ext uri="{FF2B5EF4-FFF2-40B4-BE49-F238E27FC236}">
+              <a16:creationId xmlns:a16="http://schemas.microsoft.com/office/drawing/2014/main" id="{830829EC-456C-19B9-544F-CDCB6CDD6F33}"/>
+            </a:ext>
+          </a:extLst>
+        </p:cNvPr>
+        <p:cNvGrpSpPr/>
+        <p:nvPr/>
+      </p:nvGrpSpPr>
+      <p:grpSpPr>
+        <a:xfrm>
+          <a:off x="0" y="0"/>
+          <a:ext cx="0" cy="0"/>
+          <a:chOff x="0" y="0"/>
+          <a:chExt cx="0" cy="0"/>
+        </a:xfrm>
+      </p:grpSpPr>
+      <p:sp>
+        <p:nvSpPr>
+          <p:cNvPr id="4" name="Номер слайда 3">
+            <a:extLst>
+              <a:ext uri="{FF2B5EF4-FFF2-40B4-BE49-F238E27FC236}">
+                <a16:creationId xmlns:a16="http://schemas.microsoft.com/office/drawing/2014/main" id="{419A57E9-76F0-F5A9-7215-6F8645089F3F}"/>
+              </a:ext>
+            </a:extLst>
+          </p:cNvPr>
+          <p:cNvSpPr>
+            <a:spLocks noGrp="1"/>
+          </p:cNvSpPr>
+          <p:nvPr>
+            <p:ph type="sldNum" sz="quarter" idx="12"/>
+          </p:nvPr>
+        </p:nvSpPr>
+        <p:spPr/>
+        <p:txBody>
+          <a:bodyPr/>
+          <a:lstStyle/>
+          <a:p>
+            <a:fld id="{97062FB6-5D41-4B3D-BD8B-8E2B9EA26C81}" type="slidenum">
+              <a:rPr lang="ru-RU" smtClean="0"/>
+              <a:t>17</a:t>
+            </a:fld>
+            <a:endParaRPr lang="ru-RU"/>
+          </a:p>
+        </p:txBody>
+      </p:sp>
+      <p:sp>
+        <p:nvSpPr>
+          <p:cNvPr id="6" name="Заголовок 1">
+            <a:extLst>
+              <a:ext uri="{FF2B5EF4-FFF2-40B4-BE49-F238E27FC236}">
+                <a16:creationId xmlns:a16="http://schemas.microsoft.com/office/drawing/2014/main" id="{6EB4F014-1D76-3442-B5F2-128407E8E0CE}"/>
+              </a:ext>
+            </a:extLst>
+          </p:cNvPr>
+          <p:cNvSpPr txBox="1">
+            <a:spLocks/>
+          </p:cNvSpPr>
+          <p:nvPr/>
+        </p:nvSpPr>
+        <p:spPr>
+          <a:xfrm>
+            <a:off x="628650" y="2"/>
+            <a:ext cx="7886700" cy="618565"/>
+          </a:xfrm>
+          <a:prstGeom prst="rect">
+            <a:avLst/>
+          </a:prstGeom>
+        </p:spPr>
+        <p:txBody>
+          <a:bodyPr vert="horz" lIns="91440" tIns="45720" rIns="91440" bIns="45720" rtlCol="0" anchor="ctr">
+            <a:normAutofit fontScale="92500" lnSpcReduction="20000"/>
+          </a:bodyPr>
+          <a:lstStyle>
+            <a:lvl1pPr algn="l" defTabSz="914400" rtl="0" eaLnBrk="1" latinLnBrk="0" hangingPunct="1">
+              <a:lnSpc>
+                <a:spcPct val="90000"/>
+              </a:lnSpc>
+              <a:spcBef>
+                <a:spcPct val="0"/>
+              </a:spcBef>
+              <a:buNone/>
+              <a:defRPr sz="4400" kern="1200">
+                <a:solidFill>
+                  <a:schemeClr val="tx1"/>
+                </a:solidFill>
+                <a:latin typeface="+mj-lt"/>
+                <a:ea typeface="+mj-ea"/>
+                <a:cs typeface="+mj-cs"/>
+              </a:defRPr>
+            </a:lvl1pPr>
+          </a:lstStyle>
+          <a:p>
+            <a:pPr algn="ctr"/>
+            <a:r>
+              <a:rPr lang="ru-RU" sz="2400" b="1" dirty="0">
+                <a:latin typeface="Times New Roman" panose="02020603050405020304" pitchFamily="18" charset="0"/>
+                <a:cs typeface="Times New Roman" panose="02020603050405020304" pitchFamily="18" charset="0"/>
+              </a:rPr>
+              <a:t>Адаптированный под мобильные устройства интерфейс страницы журнала посещаемости</a:t>
+            </a:r>
+          </a:p>
+        </p:txBody>
+      </p:sp>
+      <p:sp>
+        <p:nvSpPr>
+          <p:cNvPr id="3" name="Объект 2">
+            <a:extLst>
+              <a:ext uri="{FF2B5EF4-FFF2-40B4-BE49-F238E27FC236}">
+                <a16:creationId xmlns:a16="http://schemas.microsoft.com/office/drawing/2014/main" id="{6C45E9A0-0FAD-272B-0591-F3B833024277}"/>
+              </a:ext>
+            </a:extLst>
+          </p:cNvPr>
+          <p:cNvSpPr>
+            <a:spLocks noGrp="1"/>
+          </p:cNvSpPr>
+          <p:nvPr>
+            <p:ph idx="1"/>
+          </p:nvPr>
+        </p:nvSpPr>
+        <p:spPr/>
+        <p:txBody>
+          <a:bodyPr/>
+          <a:lstStyle/>
+          <a:p>
+            <a:endParaRPr lang="ru-RU"/>
+          </a:p>
+        </p:txBody>
+      </p:sp>
+      <p:pic>
+        <p:nvPicPr>
+          <p:cNvPr id="7" name="Рисунок 6">
+            <a:extLst>
+              <a:ext uri="{FF2B5EF4-FFF2-40B4-BE49-F238E27FC236}">
+                <a16:creationId xmlns:a16="http://schemas.microsoft.com/office/drawing/2014/main" id="{6C44E5A5-5176-6CCF-67C1-664086027E2E}"/>
+              </a:ext>
+            </a:extLst>
+          </p:cNvPr>
+          <p:cNvPicPr>
+            <a:picLocks noChangeAspect="1"/>
+          </p:cNvPicPr>
+          <p:nvPr/>
+        </p:nvPicPr>
+        <p:blipFill>
+          <a:blip r:embed="rId2" cstate="print">
+            <a:extLst>
+              <a:ext uri="{28A0092B-C50C-407E-A947-70E740481C1C}">
+                <a14:useLocalDpi xmlns:a14="http://schemas.microsoft.com/office/drawing/2010/main" val="0"/>
+              </a:ext>
+            </a:extLst>
+          </a:blip>
+          <a:srcRect/>
+          <a:stretch>
+            <a:fillRect/>
+          </a:stretch>
+        </p:blipFill>
+        <p:spPr bwMode="auto">
+          <a:xfrm>
+            <a:off x="3402644" y="830814"/>
+            <a:ext cx="2338711" cy="5196371"/>
+          </a:xfrm>
+          <a:prstGeom prst="rect">
+            <a:avLst/>
+          </a:prstGeom>
+          <a:noFill/>
+          <a:ln>
+            <a:noFill/>
+          </a:ln>
+        </p:spPr>
+      </p:pic>
+    </p:spTree>
+    <p:extLst>
+      <p:ext uri="{BB962C8B-B14F-4D97-AF65-F5344CB8AC3E}">
+        <p14:creationId xmlns:p14="http://schemas.microsoft.com/office/powerpoint/2010/main" val="3119094091"/>
+      </p:ext>
+    </p:extLst>
+  </p:cSld>
+  <p:clrMapOvr>
+    <a:masterClrMapping/>
+  </p:clrMapOvr>
+  <p:transition spd="slow">
+    <p:push dir="u"/>
+  </p:transition>
+</p:sld>
+</file>
+
+<file path=ppt/slides/slide18.xml><?xml version="1.0" encoding="utf-8"?>
+<p:sld xmlns:a="http://schemas.openxmlformats.org/drawingml/2006/main" xmlns:r="http://schemas.openxmlformats.org/officeDocument/2006/relationships" xmlns:p="http://schemas.openxmlformats.org/presentationml/2006/main">
+  <p:cSld>
+    <p:spTree>
+      <p:nvGrpSpPr>
+        <p:cNvPr id="1" name="">
+          <a:extLst>
+            <a:ext uri="{FF2B5EF4-FFF2-40B4-BE49-F238E27FC236}">
+              <a16:creationId xmlns:a16="http://schemas.microsoft.com/office/drawing/2014/main" id="{84249BF2-3191-BB90-CB8F-20279E686ECA}"/>
+            </a:ext>
+          </a:extLst>
+        </p:cNvPr>
+        <p:cNvGrpSpPr/>
+        <p:nvPr/>
+      </p:nvGrpSpPr>
+      <p:grpSpPr>
+        <a:xfrm>
+          <a:off x="0" y="0"/>
+          <a:ext cx="0" cy="0"/>
+          <a:chOff x="0" y="0"/>
+          <a:chExt cx="0" cy="0"/>
+        </a:xfrm>
+      </p:grpSpPr>
+      <p:sp>
+        <p:nvSpPr>
+          <p:cNvPr id="4" name="Номер слайда 3">
+            <a:extLst>
+              <a:ext uri="{FF2B5EF4-FFF2-40B4-BE49-F238E27FC236}">
+                <a16:creationId xmlns:a16="http://schemas.microsoft.com/office/drawing/2014/main" id="{0D97D7B8-A329-824C-C9EB-DD1D84F9C85B}"/>
+              </a:ext>
+            </a:extLst>
+          </p:cNvPr>
+          <p:cNvSpPr>
+            <a:spLocks noGrp="1"/>
+          </p:cNvSpPr>
+          <p:nvPr>
+            <p:ph type="sldNum" sz="quarter" idx="12"/>
+          </p:nvPr>
+        </p:nvSpPr>
+        <p:spPr/>
+        <p:txBody>
+          <a:bodyPr/>
+          <a:lstStyle/>
+          <a:p>
+            <a:fld id="{97062FB6-5D41-4B3D-BD8B-8E2B9EA26C81}" type="slidenum">
+              <a:rPr lang="ru-RU" smtClean="0"/>
+              <a:t>18</a:t>
+            </a:fld>
+            <a:endParaRPr lang="ru-RU"/>
+          </a:p>
+        </p:txBody>
+      </p:sp>
+      <p:sp>
+        <p:nvSpPr>
+          <p:cNvPr id="6" name="Заголовок 1">
+            <a:extLst>
+              <a:ext uri="{FF2B5EF4-FFF2-40B4-BE49-F238E27FC236}">
+                <a16:creationId xmlns:a16="http://schemas.microsoft.com/office/drawing/2014/main" id="{350042D6-CABD-075E-594F-EACD72B7AD9A}"/>
+              </a:ext>
+            </a:extLst>
+          </p:cNvPr>
+          <p:cNvSpPr txBox="1">
+            <a:spLocks/>
+          </p:cNvSpPr>
+          <p:nvPr/>
+        </p:nvSpPr>
+        <p:spPr>
+          <a:xfrm>
+            <a:off x="628650" y="2"/>
+            <a:ext cx="7886700" cy="618565"/>
+          </a:xfrm>
+          <a:prstGeom prst="rect">
+            <a:avLst/>
+          </a:prstGeom>
+        </p:spPr>
+        <p:txBody>
+          <a:bodyPr vert="horz" lIns="91440" tIns="45720" rIns="91440" bIns="45720" rtlCol="0" anchor="ctr">
+            <a:normAutofit/>
+          </a:bodyPr>
+          <a:lstStyle>
+            <a:lvl1pPr algn="l" defTabSz="914400" rtl="0" eaLnBrk="1" latinLnBrk="0" hangingPunct="1">
+              <a:lnSpc>
+                <a:spcPct val="90000"/>
+              </a:lnSpc>
+              <a:spcBef>
+                <a:spcPct val="0"/>
+              </a:spcBef>
+              <a:buNone/>
+              <a:defRPr sz="4400" kern="1200">
+                <a:solidFill>
+                  <a:schemeClr val="tx1"/>
+                </a:solidFill>
+                <a:latin typeface="+mj-lt"/>
+                <a:ea typeface="+mj-ea"/>
+                <a:cs typeface="+mj-cs"/>
+              </a:defRPr>
+            </a:lvl1pPr>
+          </a:lstStyle>
+          <a:p>
+            <a:pPr algn="ctr"/>
+            <a:r>
+              <a:rPr lang="ru-RU" sz="2400" b="1" dirty="0">
+                <a:latin typeface="Times New Roman" panose="02020603050405020304" pitchFamily="18" charset="0"/>
+                <a:cs typeface="Times New Roman" panose="02020603050405020304" pitchFamily="18" charset="0"/>
+              </a:rPr>
+              <a:t>Анализ результатов</a:t>
+            </a:r>
+          </a:p>
+        </p:txBody>
+      </p:sp>
+      <p:sp>
+        <p:nvSpPr>
+          <p:cNvPr id="12" name="Заголовок 1">
+            <a:extLst>
+              <a:ext uri="{FF2B5EF4-FFF2-40B4-BE49-F238E27FC236}">
+                <a16:creationId xmlns:a16="http://schemas.microsoft.com/office/drawing/2014/main" id="{C5F8A0C8-B366-C133-FBFD-C23E41601167}"/>
+              </a:ext>
+            </a:extLst>
+          </p:cNvPr>
+          <p:cNvSpPr txBox="1">
+            <a:spLocks/>
+          </p:cNvSpPr>
+          <p:nvPr/>
+        </p:nvSpPr>
+        <p:spPr>
+          <a:xfrm>
+            <a:off x="628650" y="951392"/>
+            <a:ext cx="8151366" cy="5200833"/>
+          </a:xfrm>
+          <a:prstGeom prst="rect">
+            <a:avLst/>
+          </a:prstGeom>
+        </p:spPr>
+        <p:txBody>
+          <a:bodyPr vert="horz" lIns="91440" tIns="45720" rIns="91440" bIns="45720" rtlCol="0" anchor="ctr">
+            <a:normAutofit/>
+          </a:bodyPr>
+          <a:lstStyle>
+            <a:lvl1pPr algn="l" defTabSz="914400" rtl="0" eaLnBrk="1" latinLnBrk="0" hangingPunct="1">
+              <a:lnSpc>
+                <a:spcPct val="90000"/>
+              </a:lnSpc>
+              <a:spcBef>
+                <a:spcPct val="0"/>
+              </a:spcBef>
+              <a:buNone/>
+              <a:defRPr sz="4400" kern="1200">
+                <a:solidFill>
+                  <a:schemeClr val="tx1"/>
+                </a:solidFill>
+                <a:latin typeface="+mj-lt"/>
+                <a:ea typeface="+mj-ea"/>
+                <a:cs typeface="+mj-cs"/>
+              </a:defRPr>
+            </a:lvl1pPr>
+          </a:lstStyle>
+          <a:p>
+            <a:r>
+              <a:rPr lang="ru-RU" sz="2400" dirty="0">
+                <a:latin typeface="Times New Roman" panose="02020603050405020304" pitchFamily="18" charset="0"/>
+                <a:cs typeface="Times New Roman" panose="02020603050405020304" pitchFamily="18" charset="0"/>
+              </a:rPr>
+              <a:t>Внедрение разработанной подсистемы позволило получить следующие улучшения по сравнению с существующей системой учета посещаемости:</a:t>
+            </a:r>
+          </a:p>
+          <a:p>
+            <a:endParaRPr lang="ru-RU" sz="2400" dirty="0">
+              <a:latin typeface="Times New Roman" panose="02020603050405020304" pitchFamily="18" charset="0"/>
+              <a:cs typeface="Times New Roman" panose="02020603050405020304" pitchFamily="18" charset="0"/>
+            </a:endParaRPr>
+          </a:p>
+          <a:p>
+            <a:pPr marL="342900" indent="-342900">
+              <a:buFont typeface="+mj-lt"/>
+              <a:buAutoNum type="arabicPeriod"/>
+            </a:pPr>
+            <a:r>
+              <a:rPr lang="ru-RU" sz="2400" dirty="0">
+                <a:latin typeface="Times New Roman" panose="02020603050405020304" pitchFamily="18" charset="0"/>
+                <a:cs typeface="Times New Roman" panose="02020603050405020304" pitchFamily="18" charset="0"/>
+              </a:rPr>
+              <a:t>Благодаря реализации автоматического выбора занятия по текущему времени</a:t>
+            </a:r>
+          </a:p>
+          <a:p>
+            <a:pPr marL="342900" indent="-342900">
+              <a:buFont typeface="+mj-lt"/>
+              <a:buAutoNum type="arabicPeriod"/>
+            </a:pPr>
+            <a:r>
+              <a:rPr lang="ru-RU" sz="2400" dirty="0">
+                <a:latin typeface="Times New Roman" panose="02020603050405020304" pitchFamily="18" charset="0"/>
+                <a:cs typeface="Times New Roman" panose="02020603050405020304" pitchFamily="18" charset="0"/>
+              </a:rPr>
+              <a:t>Введение троичной логики и логирования событий </a:t>
+            </a:r>
+          </a:p>
+          <a:p>
+            <a:pPr marL="342900" indent="-342900">
+              <a:buFont typeface="+mj-lt"/>
+              <a:buAutoNum type="arabicPeriod"/>
+            </a:pPr>
+            <a:r>
+              <a:rPr lang="ru-RU" sz="2400" dirty="0">
+                <a:latin typeface="Times New Roman" panose="02020603050405020304" pitchFamily="18" charset="0"/>
+                <a:cs typeface="Times New Roman" panose="02020603050405020304" pitchFamily="18" charset="0"/>
+              </a:rPr>
+              <a:t>Разделение на подгруппы</a:t>
+            </a:r>
+          </a:p>
+          <a:p>
+            <a:pPr marL="342900" indent="-342900">
+              <a:buFont typeface="+mj-lt"/>
+              <a:buAutoNum type="arabicPeriod"/>
+            </a:pPr>
+            <a:r>
+              <a:rPr lang="ru-RU" sz="2400" dirty="0">
+                <a:latin typeface="Times New Roman" panose="02020603050405020304" pitchFamily="18" charset="0"/>
+                <a:cs typeface="Times New Roman" panose="02020603050405020304" pitchFamily="18" charset="0"/>
+              </a:rPr>
+              <a:t>Повышение надежности системы</a:t>
+            </a:r>
+          </a:p>
+        </p:txBody>
+      </p:sp>
+    </p:spTree>
+    <p:extLst>
+      <p:ext uri="{BB962C8B-B14F-4D97-AF65-F5344CB8AC3E}">
+        <p14:creationId xmlns:p14="http://schemas.microsoft.com/office/powerpoint/2010/main" val="988784713"/>
       </p:ext>
     </p:extLst>
   </p:cSld>
@@ -5315,244 +6064,136 @@
           </a:p>
         </p:txBody>
       </p:sp>
+      <p:sp>
+        <p:nvSpPr>
+          <p:cNvPr id="8" name="Номер слайда 7"/>
+          <p:cNvSpPr>
+            <a:spLocks noGrp="1"/>
+          </p:cNvSpPr>
+          <p:nvPr>
+            <p:ph type="sldNum" sz="quarter" idx="12"/>
+          </p:nvPr>
+        </p:nvSpPr>
+        <p:spPr/>
+        <p:txBody>
+          <a:bodyPr/>
+          <a:lstStyle/>
+          <a:p>
+            <a:fld id="{97062FB6-5D41-4B3D-BD8B-8E2B9EA26C81}" type="slidenum">
+              <a:rPr lang="ru-RU" smtClean="0"/>
+              <a:t>4</a:t>
+            </a:fld>
+            <a:endParaRPr lang="ru-RU"/>
+          </a:p>
+        </p:txBody>
+      </p:sp>
+      <p:sp>
+        <p:nvSpPr>
+          <p:cNvPr id="10" name="Объект 9">
+            <a:extLst>
+              <a:ext uri="{FF2B5EF4-FFF2-40B4-BE49-F238E27FC236}">
+                <a16:creationId xmlns:a16="http://schemas.microsoft.com/office/drawing/2014/main" id="{E794C25C-9C53-AE19-3A1B-FEA1042B11CD}"/>
+              </a:ext>
+            </a:extLst>
+          </p:cNvPr>
+          <p:cNvSpPr>
+            <a:spLocks noGrp="1"/>
+          </p:cNvSpPr>
+          <p:nvPr>
+            <p:ph idx="1"/>
+          </p:nvPr>
+        </p:nvSpPr>
+        <p:spPr/>
+        <p:txBody>
+          <a:bodyPr/>
+          <a:lstStyle/>
+          <a:p>
+            <a:endParaRPr lang="ru-RU"/>
+          </a:p>
+        </p:txBody>
+      </p:sp>
       <p:pic>
         <p:nvPicPr>
-          <p:cNvPr id="4" name="Объект 3"/>
+          <p:cNvPr id="11" name="Рисунок 10" descr="Последовательность, журнал">
+            <a:extLst>
+              <a:ext uri="{FF2B5EF4-FFF2-40B4-BE49-F238E27FC236}">
+                <a16:creationId xmlns:a16="http://schemas.microsoft.com/office/drawing/2014/main" id="{DA94D8A8-BE14-8C62-064C-E133AF1AC4CB}"/>
+              </a:ext>
+            </a:extLst>
+          </p:cNvPr>
           <p:cNvPicPr>
-            <a:picLocks noGrp="1" noChangeAspect="1"/>
+            <a:picLocks noChangeAspect="1"/>
           </p:cNvPicPr>
-          <p:nvPr>
-            <p:ph idx="1"/>
-          </p:nvPr>
+          <p:nvPr/>
         </p:nvPicPr>
-        <p:blipFill rotWithShape="1">
-          <a:blip r:embed="rId2" cstate="print">
+        <p:blipFill>
+          <a:blip r:embed="rId2">
             <a:extLst>
               <a:ext uri="{28A0092B-C50C-407E-A947-70E740481C1C}">
                 <a14:useLocalDpi xmlns:a14="http://schemas.microsoft.com/office/drawing/2010/main" val="0"/>
               </a:ext>
             </a:extLst>
           </a:blip>
-          <a:srcRect b="11664"/>
-          <a:stretch/>
+          <a:srcRect/>
+          <a:stretch>
+            <a:fillRect/>
+          </a:stretch>
         </p:blipFill>
-        <p:spPr>
+        <p:spPr bwMode="auto">
           <a:xfrm>
-            <a:off x="250306" y="2932949"/>
-            <a:ext cx="3301786" cy="1527781"/>
+            <a:off x="628650" y="1212851"/>
+            <a:ext cx="3552825" cy="5143500"/>
           </a:xfrm>
+          <a:prstGeom prst="rect">
+            <a:avLst/>
+          </a:prstGeom>
+          <a:noFill/>
+          <a:ln>
+            <a:noFill/>
+          </a:ln>
         </p:spPr>
       </p:pic>
-      <p:sp>
-        <p:nvSpPr>
-          <p:cNvPr id="8" name="Номер слайда 7"/>
-          <p:cNvSpPr>
-            <a:spLocks noGrp="1"/>
-          </p:cNvSpPr>
-          <p:nvPr>
-            <p:ph type="sldNum" sz="quarter" idx="12"/>
-          </p:nvPr>
-        </p:nvSpPr>
-        <p:spPr/>
-        <p:txBody>
-          <a:bodyPr/>
-          <a:lstStyle/>
-          <a:p>
-            <a:fld id="{97062FB6-5D41-4B3D-BD8B-8E2B9EA26C81}" type="slidenum">
-              <a:rPr lang="ru-RU" smtClean="0"/>
-              <a:t>4</a:t>
-            </a:fld>
-            <a:endParaRPr lang="ru-RU"/>
-          </a:p>
-        </p:txBody>
-      </p:sp>
       <p:pic>
         <p:nvPicPr>
-          <p:cNvPr id="5" name="Рисунок 4"/>
+          <p:cNvPr id="12" name="Рисунок 11" descr="Последовательность, журнал-Электронный">
+            <a:extLst>
+              <a:ext uri="{FF2B5EF4-FFF2-40B4-BE49-F238E27FC236}">
+                <a16:creationId xmlns:a16="http://schemas.microsoft.com/office/drawing/2014/main" id="{900A62E9-FFEC-82A8-2707-F0CA57E67586}"/>
+              </a:ext>
+            </a:extLst>
+          </p:cNvPr>
           <p:cNvPicPr>
             <a:picLocks noChangeAspect="1"/>
           </p:cNvPicPr>
           <p:nvPr/>
         </p:nvPicPr>
-        <p:blipFill rotWithShape="1">
-          <a:blip r:embed="rId3" cstate="print">
+        <p:blipFill>
+          <a:blip r:embed="rId3">
             <a:extLst>
               <a:ext uri="{28A0092B-C50C-407E-A947-70E740481C1C}">
                 <a14:useLocalDpi xmlns:a14="http://schemas.microsoft.com/office/drawing/2010/main" val="0"/>
               </a:ext>
             </a:extLst>
           </a:blip>
-          <a:srcRect l="24627" t="8262" r="24873" b="5680"/>
-          <a:stretch/>
+          <a:srcRect/>
+          <a:stretch>
+            <a:fillRect/>
+          </a:stretch>
         </p:blipFill>
-        <p:spPr>
+        <p:spPr bwMode="auto">
           <a:xfrm>
-            <a:off x="3879995" y="1950610"/>
-            <a:ext cx="1757082" cy="2510120"/>
-          </a:xfrm>
-          <a:prstGeom prst="rect">
-            <a:avLst/>
-          </a:prstGeom>
-        </p:spPr>
-      </p:pic>
-      <p:sp>
-        <p:nvSpPr>
-          <p:cNvPr id="6" name="TextBox 5"/>
-          <p:cNvSpPr txBox="1"/>
-          <p:nvPr/>
-        </p:nvSpPr>
-        <p:spPr>
-          <a:xfrm>
-            <a:off x="914936" y="4684133"/>
-            <a:ext cx="1694329" cy="369332"/>
+            <a:off x="4896774" y="1825625"/>
+            <a:ext cx="3505200" cy="3810000"/>
           </a:xfrm>
           <a:prstGeom prst="rect">
             <a:avLst/>
           </a:prstGeom>
           <a:noFill/>
-        </p:spPr>
-        <p:txBody>
-          <a:bodyPr wrap="square" rtlCol="0">
-            <a:spAutoFit/>
-          </a:bodyPr>
-          <a:lstStyle/>
-          <a:p>
-            <a:pPr algn="ctr"/>
-            <a:r>
-              <a:rPr lang="ru-RU" dirty="0">
-                <a:latin typeface="Times New Roman" panose="02020603050405020304" pitchFamily="18" charset="0"/>
-                <a:cs typeface="Times New Roman" panose="02020603050405020304" pitchFamily="18" charset="0"/>
-              </a:rPr>
-              <a:t>Структура БД</a:t>
-            </a:r>
-          </a:p>
-        </p:txBody>
-      </p:sp>
-      <p:sp>
-        <p:nvSpPr>
-          <p:cNvPr id="7" name="TextBox 6"/>
-          <p:cNvSpPr txBox="1"/>
-          <p:nvPr/>
-        </p:nvSpPr>
-        <p:spPr>
-          <a:xfrm>
-            <a:off x="3879995" y="4684133"/>
-            <a:ext cx="1649506" cy="646331"/>
-          </a:xfrm>
-          <a:prstGeom prst="rect">
-            <a:avLst/>
-          </a:prstGeom>
-          <a:noFill/>
-        </p:spPr>
-        <p:txBody>
-          <a:bodyPr wrap="square" rtlCol="0">
-            <a:spAutoFit/>
-          </a:bodyPr>
-          <a:lstStyle/>
-          <a:p>
-            <a:pPr algn="ctr"/>
-            <a:r>
-              <a:rPr lang="ru-RU" dirty="0">
-                <a:latin typeface="Times New Roman" panose="02020603050405020304" pitchFamily="18" charset="0"/>
-                <a:cs typeface="Times New Roman" panose="02020603050405020304" pitchFamily="18" charset="0"/>
-              </a:rPr>
-              <a:t>Разграничение доступа</a:t>
-            </a:r>
-          </a:p>
-        </p:txBody>
-      </p:sp>
-      <p:pic>
-        <p:nvPicPr>
-          <p:cNvPr id="9" name="Рисунок 8"/>
-          <p:cNvPicPr>
-            <a:picLocks noChangeAspect="1"/>
-          </p:cNvPicPr>
-          <p:nvPr/>
-        </p:nvPicPr>
-        <p:blipFill>
-          <a:blip r:embed="rId4" cstate="print">
-            <a:extLst>
-              <a:ext uri="{28A0092B-C50C-407E-A947-70E740481C1C}">
-                <a14:useLocalDpi xmlns:a14="http://schemas.microsoft.com/office/drawing/2010/main" val="0"/>
-              </a:ext>
-            </a:extLst>
-          </a:blip>
-          <a:stretch>
-            <a:fillRect/>
-          </a:stretch>
-        </p:blipFill>
-        <p:spPr>
-          <a:xfrm>
-            <a:off x="6537830" y="1950610"/>
-            <a:ext cx="1052373" cy="1052373"/>
-          </a:xfrm>
-          <a:prstGeom prst="rect">
-            <a:avLst/>
-          </a:prstGeom>
+          <a:ln>
+            <a:noFill/>
+          </a:ln>
         </p:spPr>
       </p:pic>
-      <p:pic>
-        <p:nvPicPr>
-          <p:cNvPr id="13" name="Рисунок 12"/>
-          <p:cNvPicPr>
-            <a:picLocks noChangeAspect="1"/>
-          </p:cNvPicPr>
-          <p:nvPr/>
-        </p:nvPicPr>
-        <p:blipFill>
-          <a:blip r:embed="rId5" cstate="print">
-            <a:extLst>
-              <a:ext uri="{28A0092B-C50C-407E-A947-70E740481C1C}">
-                <a14:useLocalDpi xmlns:a14="http://schemas.microsoft.com/office/drawing/2010/main" val="0"/>
-              </a:ext>
-            </a:extLst>
-          </a:blip>
-          <a:stretch>
-            <a:fillRect/>
-          </a:stretch>
-        </p:blipFill>
-        <p:spPr>
-          <a:xfrm>
-            <a:off x="6457950" y="3002983"/>
-            <a:ext cx="1212131" cy="1212131"/>
-          </a:xfrm>
-          <a:prstGeom prst="rect">
-            <a:avLst/>
-          </a:prstGeom>
-        </p:spPr>
-      </p:pic>
-      <p:sp>
-        <p:nvSpPr>
-          <p:cNvPr id="15" name="Прямоугольник 14"/>
-          <p:cNvSpPr/>
-          <p:nvPr/>
-        </p:nvSpPr>
-        <p:spPr>
-          <a:xfrm>
-            <a:off x="6349716" y="4687026"/>
-            <a:ext cx="1428597" cy="369332"/>
-          </a:xfrm>
-          <a:prstGeom prst="rect">
-            <a:avLst/>
-          </a:prstGeom>
-        </p:spPr>
-        <p:txBody>
-          <a:bodyPr wrap="none">
-            <a:spAutoFit/>
-          </a:bodyPr>
-          <a:lstStyle/>
-          <a:p>
-            <a:pPr algn="ctr"/>
-            <a:r>
-              <a:rPr lang="ru-RU" dirty="0">
-                <a:latin typeface="Times New Roman" panose="02020603050405020304" pitchFamily="18" charset="0"/>
-                <a:cs typeface="Times New Roman" panose="02020603050405020304" pitchFamily="18" charset="0"/>
-              </a:rPr>
-              <a:t>Фреймворки</a:t>
-            </a:r>
-          </a:p>
-        </p:txBody>
-      </p:sp>
     </p:spTree>
     <p:extLst>
       <p:ext uri="{BB962C8B-B14F-4D97-AF65-F5344CB8AC3E}">
@@ -7596,7 +8237,7 @@
                 <a:latin typeface="Times New Roman" panose="02020603050405020304" pitchFamily="18" charset="0"/>
                 <a:cs typeface="Times New Roman" panose="02020603050405020304" pitchFamily="18" charset="0"/>
               </a:rPr>
-              <a:t>Функциональные спецификации</a:t>
+              <a:t>Функциональные спецификация подсистемы</a:t>
             </a:r>
           </a:p>
         </p:txBody>
@@ -7723,7 +8364,7 @@
                 <a:latin typeface="Times New Roman" panose="02020603050405020304" pitchFamily="18" charset="0"/>
                 <a:cs typeface="Times New Roman" panose="02020603050405020304" pitchFamily="18" charset="0"/>
               </a:rPr>
-              <a:t>Сущности и связи системы</a:t>
+              <a:t>Информационная спецификация подсистемы</a:t>
             </a:r>
           </a:p>
         </p:txBody>
